--- a/public/downloads/yai-plan-deck.pptx
+++ b/public/downloads/yai-plan-deck.pptx
@@ -2834,7 +2834,7 @@
                   <a:srgbClr val="FFFFFF"/>
                 </a:solidFill>
               </a:rPr>
-              <a:t>YAI · INVESTOR PLAN · JUNE 2026</a:t>
+              <a:t>YAI · STRATEGIC DTV · JUNE 2026</a:t>
             </a:r>
             <a:endParaRPr lang="en-US" sz="800" dirty="0"/>
           </a:p>
@@ -3109,7 +3109,7 @@
                 <a:ea typeface="Calibri" pitchFamily="34" charset="-122"/>
                 <a:cs typeface="Calibri" pitchFamily="34" charset="-120"/>
               </a:rPr>
-              <a:t>Yai · Investor Plan · June 2026</a:t>
+              <a:t>Yai · Strategic DTV · June 2026</a:t>
             </a:r>
             <a:endParaRPr lang="en-US" sz="800" dirty="0"/>
           </a:p>
@@ -4342,7 +4342,7 @@
                 <a:ea typeface="Calibri" pitchFamily="34" charset="-122"/>
                 <a:cs typeface="Calibri" pitchFamily="34" charset="-120"/>
               </a:rPr>
-              <a:t>Yai · Investor Plan · June 2026</a:t>
+              <a:t>Yai · Strategic DTV · June 2026</a:t>
             </a:r>
             <a:endParaRPr lang="en-US" sz="800" dirty="0"/>
           </a:p>
@@ -5150,7 +5150,7 @@
                 <a:ea typeface="Calibri" pitchFamily="34" charset="-122"/>
                 <a:cs typeface="Calibri" pitchFamily="34" charset="-120"/>
               </a:rPr>
-              <a:t>Yai · Investor Plan · June 2026</a:t>
+              <a:t>Yai · Strategic DTV · June 2026</a:t>
             </a:r>
             <a:endParaRPr lang="en-US" sz="800" dirty="0"/>
           </a:p>
@@ -6080,7 +6080,7 @@
                 <a:ea typeface="Calibri" pitchFamily="34" charset="-122"/>
                 <a:cs typeface="Calibri" pitchFamily="34" charset="-120"/>
               </a:rPr>
-              <a:t>Yai · Investor Plan · June 2026</a:t>
+              <a:t>Yai · Strategic DTV · June 2026</a:t>
             </a:r>
             <a:endParaRPr lang="en-US" sz="800" dirty="0"/>
           </a:p>
@@ -7046,7 +7046,7 @@
                 <a:ea typeface="Calibri" pitchFamily="34" charset="-122"/>
                 <a:cs typeface="Calibri" pitchFamily="34" charset="-120"/>
               </a:rPr>
-              <a:t>Yai · Investor Plan · June 2026</a:t>
+              <a:t>Yai · Strategic DTV · June 2026</a:t>
             </a:r>
             <a:endParaRPr lang="en-US" sz="800" dirty="0"/>
           </a:p>
@@ -7989,7 +7989,7 @@
                 <a:ea typeface="Calibri" pitchFamily="34" charset="-122"/>
                 <a:cs typeface="Calibri" pitchFamily="34" charset="-120"/>
               </a:rPr>
-              <a:t>Yai · Investor Plan · June 2026</a:t>
+              <a:t>Yai · Strategic DTV · June 2026</a:t>
             </a:r>
             <a:endParaRPr lang="en-US" sz="800" dirty="0"/>
           </a:p>
@@ -8738,7 +8738,7 @@
                 <a:ea typeface="Calibri" pitchFamily="34" charset="-122"/>
                 <a:cs typeface="Calibri" pitchFamily="34" charset="-120"/>
               </a:rPr>
-              <a:t>Yai · Investor Plan · June 2026</a:t>
+              <a:t>Yai · Strategic DTV · June 2026</a:t>
             </a:r>
             <a:endParaRPr lang="en-US" sz="800" dirty="0"/>
           </a:p>
@@ -9623,7 +9623,7 @@
                 <a:ea typeface="Calibri" pitchFamily="34" charset="-122"/>
                 <a:cs typeface="Calibri" pitchFamily="34" charset="-120"/>
               </a:rPr>
-              <a:t>Yai · Investor Plan · June 2026</a:t>
+              <a:t>Yai · Strategic DTV · June 2026</a:t>
             </a:r>
             <a:endParaRPr lang="en-US" sz="800" dirty="0"/>
           </a:p>
@@ -10431,7 +10431,7 @@
                 <a:ea typeface="Calibri" pitchFamily="34" charset="-122"/>
                 <a:cs typeface="Calibri" pitchFamily="34" charset="-120"/>
               </a:rPr>
-              <a:t>Yai · Investor Plan · June 2026</a:t>
+              <a:t>Yai · Strategic DTV · June 2026</a:t>
             </a:r>
             <a:endParaRPr lang="en-US" sz="800" dirty="0"/>
           </a:p>
@@ -10909,7 +10909,7 @@
                 <a:ea typeface="Calibri" pitchFamily="34" charset="-122"/>
                 <a:cs typeface="Calibri" pitchFamily="34" charset="-120"/>
               </a:rPr>
-              <a:t>Yai · Investor Plan · June 2026</a:t>
+              <a:t>Yai · Strategic DTV · June 2026</a:t>
             </a:r>
             <a:endParaRPr lang="en-US" sz="800" dirty="0"/>
           </a:p>
@@ -11875,7 +11875,7 @@
                 <a:ea typeface="Calibri" pitchFamily="34" charset="-122"/>
                 <a:cs typeface="Calibri" pitchFamily="34" charset="-120"/>
               </a:rPr>
-              <a:t>Yai · Investor Plan · June 2026</a:t>
+              <a:t>Yai · Strategic DTV · June 2026</a:t>
             </a:r>
             <a:endParaRPr lang="en-US" sz="800" dirty="0"/>
           </a:p>
@@ -12841,7 +12841,7 @@
                 <a:ea typeface="Calibri" pitchFamily="34" charset="-122"/>
                 <a:cs typeface="Calibri" pitchFamily="34" charset="-120"/>
               </a:rPr>
-              <a:t>Yai · Investor Plan · June 2026</a:t>
+              <a:t>Yai · Strategic DTV · June 2026</a:t>
             </a:r>
             <a:endParaRPr lang="en-US" sz="800" dirty="0"/>
           </a:p>
@@ -13302,7 +13302,7 @@
                 <a:ea typeface="Calibri" pitchFamily="34" charset="-122"/>
                 <a:cs typeface="Calibri" pitchFamily="34" charset="-120"/>
               </a:rPr>
-              <a:t>Yai · Investor Plan · June 2026</a:t>
+              <a:t>Yai · Strategic DTV · June 2026</a:t>
             </a:r>
             <a:endParaRPr lang="en-US" sz="800" dirty="0"/>
           </a:p>
@@ -14120,7 +14120,7 @@
                 <a:ea typeface="Calibri" pitchFamily="34" charset="-122"/>
                 <a:cs typeface="Calibri" pitchFamily="34" charset="-120"/>
               </a:rPr>
-              <a:t>Yai · Investor Plan · June 2026</a:t>
+              <a:t>Yai · Strategic DTV · June 2026</a:t>
             </a:r>
             <a:endParaRPr lang="en-US" sz="800" dirty="0"/>
           </a:p>
@@ -14134,596 +14134,44 @@
         </p:nvSpPr>
         <p:spPr>
           <a:xfrm>
-            <a:off x="502920" y="1325880"/>
-            <a:ext cx="8229600" cy="274320"/>
-          </a:xfrm>
-          <a:prstGeom prst="rect">
-            <a:avLst/>
-          </a:prstGeom>
-          <a:noFill/>
-          <a:ln/>
-        </p:spPr>
-        <p:txBody>
-          <a:bodyPr wrap="square" lIns="0" tIns="0" rIns="0" bIns="0" rtlCol="0" anchor="ctr"/>
-          <a:lstStyle/>
-          <a:p>
-            <a:pPr indent="0" marL="0">
-              <a:buNone/>
-            </a:pPr>
-            <a:r>
-              <a:rPr lang="en-US" sz="1100" i="1" dirty="0">
+            <a:off x="502920" y="1280160"/>
+            <a:ext cx="8229600" cy="228600"/>
+          </a:xfrm>
+          <a:prstGeom prst="rect">
+            <a:avLst/>
+          </a:prstGeom>
+          <a:noFill/>
+          <a:ln/>
+        </p:spPr>
+        <p:txBody>
+          <a:bodyPr wrap="square" lIns="0" tIns="0" rIns="0" bIns="0" rtlCol="0" anchor="ctr"/>
+          <a:lstStyle/>
+          <a:p>
+            <a:pPr indent="0" marL="0">
+              <a:buNone/>
+            </a:pPr>
+            <a:r>
+              <a:rPr lang="en-US" sz="1000" i="1" dirty="0">
                 <a:solidFill>
                   <a:srgbClr val="1F2937"/>
                 </a:solidFill>
               </a:rPr>
-              <a:t>17 module families across Administration + Operations — each with its own Ai agents.</a:t>
-            </a:r>
-            <a:endParaRPr lang="en-US" sz="1100" dirty="0"/>
-          </a:p>
-        </p:txBody>
-      </p:sp>
-      <p:pic>
-        <p:nvPicPr>
-          <p:cNvPr id="10" name="Image 0" descr="E:\Antigravity\yai-plan\public\images\generated\agent-1.png">    </p:cNvPr>
-          <p:cNvPicPr>
-            <a:picLocks noChangeAspect="1"/>
-          </p:cNvPicPr>
-          <p:nvPr/>
-        </p:nvPicPr>
-        <p:blipFill>
-          <a:blip r:embed="rId1"/>
-          <a:srcRect l="0" r="0" t="0" b="0"/>
-          <a:stretch/>
-        </p:blipFill>
-        <p:spPr>
-          <a:xfrm>
-            <a:off x="590550" y="1737360"/>
-            <a:ext cx="502920" cy="502920"/>
-          </a:xfrm>
-          <a:prstGeom prst="ellipse">
-            <a:avLst/>
-          </a:prstGeom>
-        </p:spPr>
-      </p:pic>
-      <p:pic>
-        <p:nvPicPr>
-          <p:cNvPr id="11" name="Image 1" descr="E:\Antigravity\yai-plan\public\images\generated\agent-2.png">    </p:cNvPr>
-          <p:cNvPicPr>
-            <a:picLocks noChangeAspect="1"/>
-          </p:cNvPicPr>
-          <p:nvPr/>
-        </p:nvPicPr>
-        <p:blipFill>
-          <a:blip r:embed="rId2"/>
-          <a:srcRect l="0" r="0" t="0" b="0"/>
-          <a:stretch/>
-        </p:blipFill>
-        <p:spPr>
-          <a:xfrm>
-            <a:off x="1268730" y="1737360"/>
-            <a:ext cx="502920" cy="502920"/>
-          </a:xfrm>
-          <a:prstGeom prst="ellipse">
-            <a:avLst/>
-          </a:prstGeom>
-        </p:spPr>
-      </p:pic>
-      <p:pic>
-        <p:nvPicPr>
-          <p:cNvPr id="12" name="Image 2" descr="E:\Antigravity\yai-plan\public\images\generated\agent-3.png">    </p:cNvPr>
-          <p:cNvPicPr>
-            <a:picLocks noChangeAspect="1"/>
-          </p:cNvPicPr>
-          <p:nvPr/>
-        </p:nvPicPr>
-        <p:blipFill>
-          <a:blip r:embed="rId3"/>
-          <a:srcRect l="0" r="0" t="0" b="0"/>
-          <a:stretch/>
-        </p:blipFill>
-        <p:spPr>
-          <a:xfrm>
-            <a:off x="1946910" y="1737360"/>
-            <a:ext cx="502920" cy="502920"/>
-          </a:xfrm>
-          <a:prstGeom prst="ellipse">
-            <a:avLst/>
-          </a:prstGeom>
-        </p:spPr>
-      </p:pic>
-      <p:pic>
-        <p:nvPicPr>
-          <p:cNvPr id="13" name="Image 3" descr="E:\Antigravity\yai-plan\public\images\generated\agent-4.png">    </p:cNvPr>
-          <p:cNvPicPr>
-            <a:picLocks noChangeAspect="1"/>
-          </p:cNvPicPr>
-          <p:nvPr/>
-        </p:nvPicPr>
-        <p:blipFill>
-          <a:blip r:embed="rId4"/>
-          <a:srcRect l="0" r="0" t="0" b="0"/>
-          <a:stretch/>
-        </p:blipFill>
-        <p:spPr>
-          <a:xfrm>
-            <a:off x="2625090" y="1737360"/>
-            <a:ext cx="502920" cy="502920"/>
-          </a:xfrm>
-          <a:prstGeom prst="ellipse">
-            <a:avLst/>
-          </a:prstGeom>
-        </p:spPr>
-      </p:pic>
-      <p:pic>
-        <p:nvPicPr>
-          <p:cNvPr id="14" name="Image 4" descr="E:\Antigravity\yai-plan\public\images\generated\agent-5.png">    </p:cNvPr>
-          <p:cNvPicPr>
-            <a:picLocks noChangeAspect="1"/>
-          </p:cNvPicPr>
-          <p:nvPr/>
-        </p:nvPicPr>
-        <p:blipFill>
-          <a:blip r:embed="rId5"/>
-          <a:srcRect l="0" r="0" t="0" b="0"/>
-          <a:stretch/>
-        </p:blipFill>
-        <p:spPr>
-          <a:xfrm>
-            <a:off x="3303270" y="1737360"/>
-            <a:ext cx="502920" cy="502920"/>
-          </a:xfrm>
-          <a:prstGeom prst="ellipse">
-            <a:avLst/>
-          </a:prstGeom>
-        </p:spPr>
-      </p:pic>
-      <p:pic>
-        <p:nvPicPr>
-          <p:cNvPr id="15" name="Image 5" descr="E:\Antigravity\yai-plan\public\images\generated\agent-6.png">    </p:cNvPr>
-          <p:cNvPicPr>
-            <a:picLocks noChangeAspect="1"/>
-          </p:cNvPicPr>
-          <p:nvPr/>
-        </p:nvPicPr>
-        <p:blipFill>
-          <a:blip r:embed="rId6"/>
-          <a:srcRect l="0" r="0" t="0" b="0"/>
-          <a:stretch/>
-        </p:blipFill>
-        <p:spPr>
-          <a:xfrm>
-            <a:off x="3981450" y="1737360"/>
-            <a:ext cx="502920" cy="502920"/>
-          </a:xfrm>
-          <a:prstGeom prst="ellipse">
-            <a:avLst/>
-          </a:prstGeom>
-        </p:spPr>
-      </p:pic>
-      <p:pic>
-        <p:nvPicPr>
-          <p:cNvPr id="16" name="Image 6" descr="E:\Antigravity\yai-plan\public\images\generated\agent-7.png">    </p:cNvPr>
-          <p:cNvPicPr>
-            <a:picLocks noChangeAspect="1"/>
-          </p:cNvPicPr>
-          <p:nvPr/>
-        </p:nvPicPr>
-        <p:blipFill>
-          <a:blip r:embed="rId7"/>
-          <a:srcRect l="0" r="0" t="0" b="0"/>
-          <a:stretch/>
-        </p:blipFill>
-        <p:spPr>
-          <a:xfrm>
-            <a:off x="4659630" y="1737360"/>
-            <a:ext cx="502920" cy="502920"/>
-          </a:xfrm>
-          <a:prstGeom prst="ellipse">
-            <a:avLst/>
-          </a:prstGeom>
-        </p:spPr>
-      </p:pic>
-      <p:pic>
-        <p:nvPicPr>
-          <p:cNvPr id="17" name="Image 7" descr="E:\Antigravity\yai-plan\public\images\generated\agent-8.png">    </p:cNvPr>
-          <p:cNvPicPr>
-            <a:picLocks noChangeAspect="1"/>
-          </p:cNvPicPr>
-          <p:nvPr/>
-        </p:nvPicPr>
-        <p:blipFill>
-          <a:blip r:embed="rId8"/>
-          <a:srcRect l="0" r="0" t="0" b="0"/>
-          <a:stretch/>
-        </p:blipFill>
-        <p:spPr>
-          <a:xfrm>
-            <a:off x="5337810" y="1737360"/>
-            <a:ext cx="502920" cy="502920"/>
-          </a:xfrm>
-          <a:prstGeom prst="ellipse">
-            <a:avLst/>
-          </a:prstGeom>
-        </p:spPr>
-      </p:pic>
-      <p:pic>
-        <p:nvPicPr>
-          <p:cNvPr id="18" name="Image 8" descr="E:\Antigravity\yai-plan\public\images\generated\agent-9.png">    </p:cNvPr>
-          <p:cNvPicPr>
-            <a:picLocks noChangeAspect="1"/>
-          </p:cNvPicPr>
-          <p:nvPr/>
-        </p:nvPicPr>
-        <p:blipFill>
-          <a:blip r:embed="rId9"/>
-          <a:srcRect l="0" r="0" t="0" b="0"/>
-          <a:stretch/>
-        </p:blipFill>
-        <p:spPr>
-          <a:xfrm>
-            <a:off x="6015990" y="1737360"/>
-            <a:ext cx="502920" cy="502920"/>
-          </a:xfrm>
-          <a:prstGeom prst="ellipse">
-            <a:avLst/>
-          </a:prstGeom>
-        </p:spPr>
-      </p:pic>
-      <p:pic>
-        <p:nvPicPr>
-          <p:cNvPr id="19" name="Image 9" descr="E:\Antigravity\yai-plan\public\images\generated\agent-10.png">    </p:cNvPr>
-          <p:cNvPicPr>
-            <a:picLocks noChangeAspect="1"/>
-          </p:cNvPicPr>
-          <p:nvPr/>
-        </p:nvPicPr>
-        <p:blipFill>
-          <a:blip r:embed="rId10"/>
-          <a:srcRect l="0" r="0" t="0" b="0"/>
-          <a:stretch/>
-        </p:blipFill>
-        <p:spPr>
-          <a:xfrm>
-            <a:off x="6694170" y="1737360"/>
-            <a:ext cx="502920" cy="502920"/>
-          </a:xfrm>
-          <a:prstGeom prst="ellipse">
-            <a:avLst/>
-          </a:prstGeom>
-        </p:spPr>
-      </p:pic>
-      <p:pic>
-        <p:nvPicPr>
-          <p:cNvPr id="20" name="Image 10" descr="E:\Antigravity\yai-plan\public\images\generated\agent-11.png">    </p:cNvPr>
-          <p:cNvPicPr>
-            <a:picLocks noChangeAspect="1"/>
-          </p:cNvPicPr>
-          <p:nvPr/>
-        </p:nvPicPr>
-        <p:blipFill>
-          <a:blip r:embed="rId11"/>
-          <a:srcRect l="0" r="0" t="0" b="0"/>
-          <a:stretch/>
-        </p:blipFill>
-        <p:spPr>
-          <a:xfrm>
-            <a:off x="7372350" y="1737360"/>
-            <a:ext cx="502920" cy="502920"/>
-          </a:xfrm>
-          <a:prstGeom prst="ellipse">
-            <a:avLst/>
-          </a:prstGeom>
-        </p:spPr>
-      </p:pic>
-      <p:pic>
-        <p:nvPicPr>
-          <p:cNvPr id="21" name="Image 11" descr="E:\Antigravity\yai-plan\public\images\generated\agent-12.png">    </p:cNvPr>
-          <p:cNvPicPr>
-            <a:picLocks noChangeAspect="1"/>
-          </p:cNvPicPr>
-          <p:nvPr/>
-        </p:nvPicPr>
-        <p:blipFill>
-          <a:blip r:embed="rId12"/>
-          <a:srcRect l="0" r="0" t="0" b="0"/>
-          <a:stretch/>
-        </p:blipFill>
-        <p:spPr>
-          <a:xfrm>
-            <a:off x="8050530" y="1737360"/>
-            <a:ext cx="502920" cy="502920"/>
-          </a:xfrm>
-          <a:prstGeom prst="ellipse">
-            <a:avLst/>
-          </a:prstGeom>
-        </p:spPr>
-      </p:pic>
-      <p:pic>
-        <p:nvPicPr>
-          <p:cNvPr id="22" name="Image 12" descr="E:\Antigravity\yai-plan\public\images\generated\agent-13.png">    </p:cNvPr>
-          <p:cNvPicPr>
-            <a:picLocks noChangeAspect="1"/>
-          </p:cNvPicPr>
-          <p:nvPr/>
-        </p:nvPicPr>
-        <p:blipFill>
-          <a:blip r:embed="rId13"/>
-          <a:srcRect l="0" r="0" t="0" b="0"/>
-          <a:stretch/>
-        </p:blipFill>
-        <p:spPr>
-          <a:xfrm>
-            <a:off x="590550" y="2377440"/>
-            <a:ext cx="502920" cy="502920"/>
-          </a:xfrm>
-          <a:prstGeom prst="ellipse">
-            <a:avLst/>
-          </a:prstGeom>
-        </p:spPr>
-      </p:pic>
-      <p:pic>
-        <p:nvPicPr>
-          <p:cNvPr id="23" name="Image 13" descr="E:\Antigravity\yai-plan\public\images\generated\agent-14.png">    </p:cNvPr>
-          <p:cNvPicPr>
-            <a:picLocks noChangeAspect="1"/>
-          </p:cNvPicPr>
-          <p:nvPr/>
-        </p:nvPicPr>
-        <p:blipFill>
-          <a:blip r:embed="rId14"/>
-          <a:srcRect l="0" r="0" t="0" b="0"/>
-          <a:stretch/>
-        </p:blipFill>
-        <p:spPr>
-          <a:xfrm>
-            <a:off x="1268730" y="2377440"/>
-            <a:ext cx="502920" cy="502920"/>
-          </a:xfrm>
-          <a:prstGeom prst="ellipse">
-            <a:avLst/>
-          </a:prstGeom>
-        </p:spPr>
-      </p:pic>
-      <p:pic>
-        <p:nvPicPr>
-          <p:cNvPr id="24" name="Image 14" descr="E:\Antigravity\yai-plan\public\images\generated\agent-15.png">    </p:cNvPr>
-          <p:cNvPicPr>
-            <a:picLocks noChangeAspect="1"/>
-          </p:cNvPicPr>
-          <p:nvPr/>
-        </p:nvPicPr>
-        <p:blipFill>
-          <a:blip r:embed="rId15"/>
-          <a:srcRect l="0" r="0" t="0" b="0"/>
-          <a:stretch/>
-        </p:blipFill>
-        <p:spPr>
-          <a:xfrm>
-            <a:off x="1946910" y="2377440"/>
-            <a:ext cx="502920" cy="502920"/>
-          </a:xfrm>
-          <a:prstGeom prst="ellipse">
-            <a:avLst/>
-          </a:prstGeom>
-        </p:spPr>
-      </p:pic>
-      <p:pic>
-        <p:nvPicPr>
-          <p:cNvPr id="25" name="Image 15" descr="E:\Antigravity\yai-plan\public\images\generated\agent-16.png">    </p:cNvPr>
-          <p:cNvPicPr>
-            <a:picLocks noChangeAspect="1"/>
-          </p:cNvPicPr>
-          <p:nvPr/>
-        </p:nvPicPr>
-        <p:blipFill>
-          <a:blip r:embed="rId16"/>
-          <a:srcRect l="0" r="0" t="0" b="0"/>
-          <a:stretch/>
-        </p:blipFill>
-        <p:spPr>
-          <a:xfrm>
-            <a:off x="2625090" y="2377440"/>
-            <a:ext cx="502920" cy="502920"/>
-          </a:xfrm>
-          <a:prstGeom prst="ellipse">
-            <a:avLst/>
-          </a:prstGeom>
-        </p:spPr>
-      </p:pic>
-      <p:pic>
-        <p:nvPicPr>
-          <p:cNvPr id="26" name="Image 16" descr="E:\Antigravity\yai-plan\public\images\generated\agent-17.png">    </p:cNvPr>
-          <p:cNvPicPr>
-            <a:picLocks noChangeAspect="1"/>
-          </p:cNvPicPr>
-          <p:nvPr/>
-        </p:nvPicPr>
-        <p:blipFill>
-          <a:blip r:embed="rId17"/>
-          <a:srcRect l="0" r="0" t="0" b="0"/>
-          <a:stretch/>
-        </p:blipFill>
-        <p:spPr>
-          <a:xfrm>
-            <a:off x="3303270" y="2377440"/>
-            <a:ext cx="502920" cy="502920"/>
-          </a:xfrm>
-          <a:prstGeom prst="ellipse">
-            <a:avLst/>
-          </a:prstGeom>
-        </p:spPr>
-      </p:pic>
-      <p:pic>
-        <p:nvPicPr>
-          <p:cNvPr id="27" name="Image 17" descr="E:\Antigravity\yai-plan\public\images\generated\agent-18.png">    </p:cNvPr>
-          <p:cNvPicPr>
-            <a:picLocks noChangeAspect="1"/>
-          </p:cNvPicPr>
-          <p:nvPr/>
-        </p:nvPicPr>
-        <p:blipFill>
-          <a:blip r:embed="rId18"/>
-          <a:srcRect l="0" r="0" t="0" b="0"/>
-          <a:stretch/>
-        </p:blipFill>
-        <p:spPr>
-          <a:xfrm>
-            <a:off x="3981450" y="2377440"/>
-            <a:ext cx="502920" cy="502920"/>
-          </a:xfrm>
-          <a:prstGeom prst="ellipse">
-            <a:avLst/>
-          </a:prstGeom>
-        </p:spPr>
-      </p:pic>
-      <p:pic>
-        <p:nvPicPr>
-          <p:cNvPr id="28" name="Image 18" descr="E:\Antigravity\yai-plan\public\images\generated\agent-19.png">    </p:cNvPr>
-          <p:cNvPicPr>
-            <a:picLocks noChangeAspect="1"/>
-          </p:cNvPicPr>
-          <p:nvPr/>
-        </p:nvPicPr>
-        <p:blipFill>
-          <a:blip r:embed="rId19"/>
-          <a:srcRect l="0" r="0" t="0" b="0"/>
-          <a:stretch/>
-        </p:blipFill>
-        <p:spPr>
-          <a:xfrm>
-            <a:off x="4659630" y="2377440"/>
-            <a:ext cx="502920" cy="502920"/>
-          </a:xfrm>
-          <a:prstGeom prst="ellipse">
-            <a:avLst/>
-          </a:prstGeom>
-        </p:spPr>
-      </p:pic>
-      <p:pic>
-        <p:nvPicPr>
-          <p:cNvPr id="29" name="Image 19" descr="E:\Antigravity\yai-plan\public\images\generated\agent-20.png">    </p:cNvPr>
-          <p:cNvPicPr>
-            <a:picLocks noChangeAspect="1"/>
-          </p:cNvPicPr>
-          <p:nvPr/>
-        </p:nvPicPr>
-        <p:blipFill>
-          <a:blip r:embed="rId20"/>
-          <a:srcRect l="0" r="0" t="0" b="0"/>
-          <a:stretch/>
-        </p:blipFill>
-        <p:spPr>
-          <a:xfrm>
-            <a:off x="5337810" y="2377440"/>
-            <a:ext cx="502920" cy="502920"/>
-          </a:xfrm>
-          <a:prstGeom prst="ellipse">
-            <a:avLst/>
-          </a:prstGeom>
-        </p:spPr>
-      </p:pic>
-      <p:pic>
-        <p:nvPicPr>
-          <p:cNvPr id="30" name="Image 20" descr="E:\Antigravity\yai-plan\public\images\generated\agent-21.png">    </p:cNvPr>
-          <p:cNvPicPr>
-            <a:picLocks noChangeAspect="1"/>
-          </p:cNvPicPr>
-          <p:nvPr/>
-        </p:nvPicPr>
-        <p:blipFill>
-          <a:blip r:embed="rId21"/>
-          <a:srcRect l="0" r="0" t="0" b="0"/>
-          <a:stretch/>
-        </p:blipFill>
-        <p:spPr>
-          <a:xfrm>
-            <a:off x="6015990" y="2377440"/>
-            <a:ext cx="502920" cy="502920"/>
-          </a:xfrm>
-          <a:prstGeom prst="ellipse">
-            <a:avLst/>
-          </a:prstGeom>
-        </p:spPr>
-      </p:pic>
-      <p:pic>
-        <p:nvPicPr>
-          <p:cNvPr id="31" name="Image 21" descr="E:\Antigravity\yai-plan\public\images\generated\agent-22.png">    </p:cNvPr>
-          <p:cNvPicPr>
-            <a:picLocks noChangeAspect="1"/>
-          </p:cNvPicPr>
-          <p:nvPr/>
-        </p:nvPicPr>
-        <p:blipFill>
-          <a:blip r:embed="rId22"/>
-          <a:srcRect l="0" r="0" t="0" b="0"/>
-          <a:stretch/>
-        </p:blipFill>
-        <p:spPr>
-          <a:xfrm>
-            <a:off x="6694170" y="2377440"/>
-            <a:ext cx="502920" cy="502920"/>
-          </a:xfrm>
-          <a:prstGeom prst="ellipse">
-            <a:avLst/>
-          </a:prstGeom>
-        </p:spPr>
-      </p:pic>
-      <p:pic>
-        <p:nvPicPr>
-          <p:cNvPr id="32" name="Image 22" descr="E:\Antigravity\yai-plan\public\images\generated\agent-23.png">    </p:cNvPr>
-          <p:cNvPicPr>
-            <a:picLocks noChangeAspect="1"/>
-          </p:cNvPicPr>
-          <p:nvPr/>
-        </p:nvPicPr>
-        <p:blipFill>
-          <a:blip r:embed="rId23"/>
-          <a:srcRect l="0" r="0" t="0" b="0"/>
-          <a:stretch/>
-        </p:blipFill>
-        <p:spPr>
-          <a:xfrm>
-            <a:off x="7372350" y="2377440"/>
-            <a:ext cx="502920" cy="502920"/>
-          </a:xfrm>
-          <a:prstGeom prst="ellipse">
-            <a:avLst/>
-          </a:prstGeom>
-        </p:spPr>
-      </p:pic>
-      <p:pic>
-        <p:nvPicPr>
-          <p:cNvPr id="33" name="Image 23" descr="E:\Antigravity\yai-plan\public\images\generated\agent-24.png">    </p:cNvPr>
-          <p:cNvPicPr>
-            <a:picLocks noChangeAspect="1"/>
-          </p:cNvPicPr>
-          <p:nvPr/>
-        </p:nvPicPr>
-        <p:blipFill>
-          <a:blip r:embed="rId24"/>
-          <a:srcRect l="0" r="0" t="0" b="0"/>
-          <a:stretch/>
-        </p:blipFill>
-        <p:spPr>
-          <a:xfrm>
-            <a:off x="8050530" y="2377440"/>
-            <a:ext cx="502920" cy="502920"/>
-          </a:xfrm>
-          <a:prstGeom prst="ellipse">
-            <a:avLst/>
-          </a:prstGeom>
-        </p:spPr>
-      </p:pic>
-      <p:sp>
-        <p:nvSpPr>
-          <p:cNvPr id="34" name="Shape 8"/>
-          <p:cNvSpPr/>
-          <p:nvPr/>
-        </p:nvSpPr>
-        <p:spPr>
-          <a:xfrm>
-            <a:off x="502920" y="3520440"/>
-            <a:ext cx="1965960" cy="1097280"/>
+              <a:t>18 modules — each colour-coded by group, each with its own Ai agents + native tasks.</a:t>
+            </a:r>
+            <a:endParaRPr lang="en-US" sz="1000" dirty="0"/>
+          </a:p>
+        </p:txBody>
+      </p:sp>
+      <p:sp>
+        <p:nvSpPr>
+          <p:cNvPr id="10" name="Shape 8"/>
+          <p:cNvSpPr/>
+          <p:nvPr/>
+        </p:nvSpPr>
+        <p:spPr>
+          <a:xfrm>
+            <a:off x="502920" y="1691640"/>
+            <a:ext cx="1295400" cy="868680"/>
           </a:xfrm>
           <a:prstGeom prst="rect">
             <a:avLst/>
@@ -14731,7 +14179,32 @@
           <a:solidFill>
             <a:srgbClr val="FFFFFF"/>
           </a:solidFill>
-          <a:ln w="19050">
+          <a:ln w="6350">
+            <a:solidFill>
+              <a:srgbClr val="E2E8F0"/>
+            </a:solidFill>
+            <a:prstDash val="solid"/>
+          </a:ln>
+        </p:spPr>
+      </p:sp>
+      <p:sp>
+        <p:nvSpPr>
+          <p:cNvPr id="11" name="Shape 9"/>
+          <p:cNvSpPr/>
+          <p:nvPr/>
+        </p:nvSpPr>
+        <p:spPr>
+          <a:xfrm>
+            <a:off x="502920" y="1691640"/>
+            <a:ext cx="54864" cy="868680"/>
+          </a:xfrm>
+          <a:prstGeom prst="rect">
+            <a:avLst/>
+          </a:prstGeom>
+          <a:solidFill>
+            <a:srgbClr val="1E4DAA"/>
+          </a:solidFill>
+          <a:ln w="12700">
             <a:solidFill>
               <a:srgbClr val="1E4DAA"/>
             </a:solidFill>
@@ -14741,86 +14214,86 @@
       </p:sp>
       <p:sp>
         <p:nvSpPr>
-          <p:cNvPr id="35" name="Text 9"/>
-          <p:cNvSpPr/>
-          <p:nvPr/>
-        </p:nvSpPr>
-        <p:spPr>
-          <a:xfrm>
-            <a:off x="612648" y="3685032"/>
-            <a:ext cx="1746504" cy="228600"/>
-          </a:xfrm>
-          <a:prstGeom prst="rect">
-            <a:avLst/>
-          </a:prstGeom>
-          <a:noFill/>
-          <a:ln/>
-        </p:spPr>
-        <p:txBody>
-          <a:bodyPr wrap="square" lIns="0" tIns="0" rIns="0" bIns="0" rtlCol="0" anchor="ctr"/>
-          <a:lstStyle/>
-          <a:p>
-            <a:pPr indent="0" marL="0">
-              <a:buNone/>
-            </a:pPr>
-            <a:r>
-              <a:rPr lang="en-US" sz="900" b="1" spc="300" kern="0" dirty="0">
+          <p:cNvPr id="12" name="Text 10"/>
+          <p:cNvSpPr/>
+          <p:nvPr/>
+        </p:nvSpPr>
+        <p:spPr>
+          <a:xfrm>
+            <a:off x="621792" y="1783080"/>
+            <a:ext cx="929640" cy="256032"/>
+          </a:xfrm>
+          <a:prstGeom prst="rect">
+            <a:avLst/>
+          </a:prstGeom>
+          <a:noFill/>
+          <a:ln/>
+        </p:spPr>
+        <p:txBody>
+          <a:bodyPr wrap="square" lIns="0" tIns="0" rIns="0" bIns="0" rtlCol="0" anchor="ctr"/>
+          <a:lstStyle/>
+          <a:p>
+            <a:pPr indent="0" marL="0">
+              <a:buNone/>
+            </a:pPr>
+            <a:r>
+              <a:rPr lang="en-US" sz="1000" b="1" dirty="0">
                 <a:solidFill>
                   <a:srgbClr val="1E4DAA"/>
                 </a:solidFill>
               </a:rPr>
-              <a:t>ADMINISTRATION</a:t>
-            </a:r>
-            <a:endParaRPr lang="en-US" sz="900" dirty="0"/>
-          </a:p>
-        </p:txBody>
-      </p:sp>
-      <p:sp>
-        <p:nvSpPr>
-          <p:cNvPr id="36" name="Text 10"/>
-          <p:cNvSpPr/>
-          <p:nvPr/>
-        </p:nvSpPr>
-        <p:spPr>
-          <a:xfrm>
-            <a:off x="612648" y="4023360"/>
-            <a:ext cx="1746504" cy="502920"/>
-          </a:xfrm>
-          <a:prstGeom prst="rect">
-            <a:avLst/>
-          </a:prstGeom>
-          <a:noFill/>
-          <a:ln/>
-        </p:spPr>
-        <p:txBody>
-          <a:bodyPr wrap="square" lIns="0" tIns="0" rIns="0" bIns="0" rtlCol="0" anchor="ctr"/>
-          <a:lstStyle/>
-          <a:p>
-            <a:pPr indent="0" marL="0">
-              <a:buNone/>
-            </a:pPr>
-            <a:r>
-              <a:rPr lang="en-US" sz="1800" b="1" dirty="0">
-                <a:solidFill>
-                  <a:srgbClr val="0A1F47"/>
-                </a:solidFill>
-              </a:rPr>
-              <a:t>9 modules</a:t>
-            </a:r>
-            <a:endParaRPr lang="en-US" sz="1800" dirty="0"/>
-          </a:p>
-        </p:txBody>
-      </p:sp>
-      <p:sp>
-        <p:nvSpPr>
-          <p:cNvPr id="37" name="Shape 11"/>
-          <p:cNvSpPr/>
-          <p:nvPr/>
-        </p:nvSpPr>
-        <p:spPr>
-          <a:xfrm>
-            <a:off x="2560320" y="3520440"/>
-            <a:ext cx="1965960" cy="1097280"/>
+              <a:t>Admin Core</a:t>
+            </a:r>
+            <a:endParaRPr lang="en-US" sz="1000" dirty="0"/>
+          </a:p>
+        </p:txBody>
+      </p:sp>
+      <p:sp>
+        <p:nvSpPr>
+          <p:cNvPr id="13" name="Text 11"/>
+          <p:cNvSpPr/>
+          <p:nvPr/>
+        </p:nvSpPr>
+        <p:spPr>
+          <a:xfrm>
+            <a:off x="621792" y="2057400"/>
+            <a:ext cx="1112520" cy="457200"/>
+          </a:xfrm>
+          <a:prstGeom prst="rect">
+            <a:avLst/>
+          </a:prstGeom>
+          <a:noFill/>
+          <a:ln/>
+        </p:spPr>
+        <p:txBody>
+          <a:bodyPr wrap="square" lIns="0" tIns="0" rIns="0" bIns="0" rtlCol="0" anchor="ctr"/>
+          <a:lstStyle/>
+          <a:p>
+            <a:pPr indent="0" marL="0">
+              <a:buNone/>
+            </a:pPr>
+            <a:r>
+              <a:rPr lang="en-US" sz="750" dirty="0">
+                <a:solidFill>
+                  <a:srgbClr val="1F2937"/>
+                </a:solidFill>
+              </a:rPr>
+              <a:t>PR · Shop · Approvals · APP</a:t>
+            </a:r>
+            <a:endParaRPr lang="en-US" sz="750" dirty="0"/>
+          </a:p>
+        </p:txBody>
+      </p:sp>
+      <p:sp>
+        <p:nvSpPr>
+          <p:cNvPr id="14" name="Shape 12"/>
+          <p:cNvSpPr/>
+          <p:nvPr/>
+        </p:nvSpPr>
+        <p:spPr>
+          <a:xfrm>
+            <a:off x="1871472" y="1691640"/>
+            <a:ext cx="1295400" cy="868680"/>
           </a:xfrm>
           <a:prstGeom prst="rect">
             <a:avLst/>
@@ -14828,7 +14301,1069 @@
           <a:solidFill>
             <a:srgbClr val="FFFFFF"/>
           </a:solidFill>
-          <a:ln w="19050">
+          <a:ln w="6350">
+            <a:solidFill>
+              <a:srgbClr val="E2E8F0"/>
+            </a:solidFill>
+            <a:prstDash val="solid"/>
+          </a:ln>
+        </p:spPr>
+      </p:sp>
+      <p:sp>
+        <p:nvSpPr>
+          <p:cNvPr id="15" name="Shape 13"/>
+          <p:cNvSpPr/>
+          <p:nvPr/>
+        </p:nvSpPr>
+        <p:spPr>
+          <a:xfrm>
+            <a:off x="1871472" y="1691640"/>
+            <a:ext cx="54864" cy="868680"/>
+          </a:xfrm>
+          <a:prstGeom prst="rect">
+            <a:avLst/>
+          </a:prstGeom>
+          <a:solidFill>
+            <a:srgbClr val="1E4DAA"/>
+          </a:solidFill>
+          <a:ln w="12700">
+            <a:solidFill>
+              <a:srgbClr val="1E4DAA"/>
+            </a:solidFill>
+            <a:prstDash val="solid"/>
+          </a:ln>
+        </p:spPr>
+      </p:sp>
+      <p:sp>
+        <p:nvSpPr>
+          <p:cNvPr id="16" name="Text 14"/>
+          <p:cNvSpPr/>
+          <p:nvPr/>
+        </p:nvSpPr>
+        <p:spPr>
+          <a:xfrm>
+            <a:off x="1990344" y="1783080"/>
+            <a:ext cx="929640" cy="256032"/>
+          </a:xfrm>
+          <a:prstGeom prst="rect">
+            <a:avLst/>
+          </a:prstGeom>
+          <a:noFill/>
+          <a:ln/>
+        </p:spPr>
+        <p:txBody>
+          <a:bodyPr wrap="square" lIns="0" tIns="0" rIns="0" bIns="0" rtlCol="0" anchor="ctr"/>
+          <a:lstStyle/>
+          <a:p>
+            <a:pPr indent="0" marL="0">
+              <a:buNone/>
+            </a:pPr>
+            <a:r>
+              <a:rPr lang="en-US" sz="1000" b="1" dirty="0">
+                <a:solidFill>
+                  <a:srgbClr val="1E4DAA"/>
+                </a:solidFill>
+              </a:rPr>
+              <a:t>HR · Pay · Org</a:t>
+            </a:r>
+            <a:endParaRPr lang="en-US" sz="1000" dirty="0"/>
+          </a:p>
+        </p:txBody>
+      </p:sp>
+      <p:sp>
+        <p:nvSpPr>
+          <p:cNvPr id="17" name="Text 15"/>
+          <p:cNvSpPr/>
+          <p:nvPr/>
+        </p:nvSpPr>
+        <p:spPr>
+          <a:xfrm>
+            <a:off x="1990344" y="2057400"/>
+            <a:ext cx="1112520" cy="457200"/>
+          </a:xfrm>
+          <a:prstGeom prst="rect">
+            <a:avLst/>
+          </a:prstGeom>
+          <a:noFill/>
+          <a:ln/>
+        </p:spPr>
+        <p:txBody>
+          <a:bodyPr wrap="square" lIns="0" tIns="0" rIns="0" bIns="0" rtlCol="0" anchor="ctr"/>
+          <a:lstStyle/>
+          <a:p>
+            <a:pPr indent="0" marL="0">
+              <a:buNone/>
+            </a:pPr>
+            <a:r>
+              <a:rPr lang="en-US" sz="750" dirty="0">
+                <a:solidFill>
+                  <a:srgbClr val="1F2937"/>
+                </a:solidFill>
+              </a:rPr>
+              <a:t>LMS · Ai CCTV · attendance</a:t>
+            </a:r>
+            <a:endParaRPr lang="en-US" sz="750" dirty="0"/>
+          </a:p>
+        </p:txBody>
+      </p:sp>
+      <p:sp>
+        <p:nvSpPr>
+          <p:cNvPr id="18" name="Shape 16"/>
+          <p:cNvSpPr/>
+          <p:nvPr/>
+        </p:nvSpPr>
+        <p:spPr>
+          <a:xfrm>
+            <a:off x="3240024" y="1691640"/>
+            <a:ext cx="1295400" cy="868680"/>
+          </a:xfrm>
+          <a:prstGeom prst="rect">
+            <a:avLst/>
+          </a:prstGeom>
+          <a:solidFill>
+            <a:srgbClr val="FFFFFF"/>
+          </a:solidFill>
+          <a:ln w="6350">
+            <a:solidFill>
+              <a:srgbClr val="E2E8F0"/>
+            </a:solidFill>
+            <a:prstDash val="solid"/>
+          </a:ln>
+        </p:spPr>
+      </p:sp>
+      <p:sp>
+        <p:nvSpPr>
+          <p:cNvPr id="19" name="Shape 17"/>
+          <p:cNvSpPr/>
+          <p:nvPr/>
+        </p:nvSpPr>
+        <p:spPr>
+          <a:xfrm>
+            <a:off x="3240024" y="1691640"/>
+            <a:ext cx="54864" cy="868680"/>
+          </a:xfrm>
+          <a:prstGeom prst="rect">
+            <a:avLst/>
+          </a:prstGeom>
+          <a:solidFill>
+            <a:srgbClr val="1E4DAA"/>
+          </a:solidFill>
+          <a:ln w="12700">
+            <a:solidFill>
+              <a:srgbClr val="1E4DAA"/>
+            </a:solidFill>
+            <a:prstDash val="solid"/>
+          </a:ln>
+        </p:spPr>
+      </p:sp>
+      <p:sp>
+        <p:nvSpPr>
+          <p:cNvPr id="20" name="Text 18"/>
+          <p:cNvSpPr/>
+          <p:nvPr/>
+        </p:nvSpPr>
+        <p:spPr>
+          <a:xfrm>
+            <a:off x="3358896" y="1783080"/>
+            <a:ext cx="929640" cy="256032"/>
+          </a:xfrm>
+          <a:prstGeom prst="rect">
+            <a:avLst/>
+          </a:prstGeom>
+          <a:noFill/>
+          <a:ln/>
+        </p:spPr>
+        <p:txBody>
+          <a:bodyPr wrap="square" lIns="0" tIns="0" rIns="0" bIns="0" rtlCol="0" anchor="ctr"/>
+          <a:lstStyle/>
+          <a:p>
+            <a:pPr indent="0" marL="0">
+              <a:buNone/>
+            </a:pPr>
+            <a:r>
+              <a:rPr lang="en-US" sz="1000" b="1" dirty="0">
+                <a:solidFill>
+                  <a:srgbClr val="1E4DAA"/>
+                </a:solidFill>
+              </a:rPr>
+              <a:t>Digital Audit</a:t>
+            </a:r>
+            <a:endParaRPr lang="en-US" sz="1000" dirty="0"/>
+          </a:p>
+        </p:txBody>
+      </p:sp>
+      <p:sp>
+        <p:nvSpPr>
+          <p:cNvPr id="21" name="Text 19"/>
+          <p:cNvSpPr/>
+          <p:nvPr/>
+        </p:nvSpPr>
+        <p:spPr>
+          <a:xfrm>
+            <a:off x="3358896" y="2057400"/>
+            <a:ext cx="1112520" cy="457200"/>
+          </a:xfrm>
+          <a:prstGeom prst="rect">
+            <a:avLst/>
+          </a:prstGeom>
+          <a:noFill/>
+          <a:ln/>
+        </p:spPr>
+        <p:txBody>
+          <a:bodyPr wrap="square" lIns="0" tIns="0" rIns="0" bIns="0" rtlCol="0" anchor="ctr"/>
+          <a:lstStyle/>
+          <a:p>
+            <a:pPr indent="0" marL="0">
+              <a:buNone/>
+            </a:pPr>
+            <a:r>
+              <a:rPr lang="en-US" sz="750" dirty="0">
+                <a:solidFill>
+                  <a:srgbClr val="1F2937"/>
+                </a:solidFill>
+              </a:rPr>
+              <a:t>8S · AIoT · waste tracking</a:t>
+            </a:r>
+            <a:endParaRPr lang="en-US" sz="750" dirty="0"/>
+          </a:p>
+        </p:txBody>
+      </p:sp>
+      <p:sp>
+        <p:nvSpPr>
+          <p:cNvPr id="22" name="Shape 20"/>
+          <p:cNvSpPr/>
+          <p:nvPr/>
+        </p:nvSpPr>
+        <p:spPr>
+          <a:xfrm>
+            <a:off x="4608576" y="1691640"/>
+            <a:ext cx="1295400" cy="868680"/>
+          </a:xfrm>
+          <a:prstGeom prst="rect">
+            <a:avLst/>
+          </a:prstGeom>
+          <a:solidFill>
+            <a:srgbClr val="FFFFFF"/>
+          </a:solidFill>
+          <a:ln w="6350">
+            <a:solidFill>
+              <a:srgbClr val="E2E8F0"/>
+            </a:solidFill>
+            <a:prstDash val="solid"/>
+          </a:ln>
+        </p:spPr>
+      </p:sp>
+      <p:sp>
+        <p:nvSpPr>
+          <p:cNvPr id="23" name="Shape 21"/>
+          <p:cNvSpPr/>
+          <p:nvPr/>
+        </p:nvSpPr>
+        <p:spPr>
+          <a:xfrm>
+            <a:off x="4608576" y="1691640"/>
+            <a:ext cx="54864" cy="868680"/>
+          </a:xfrm>
+          <a:prstGeom prst="rect">
+            <a:avLst/>
+          </a:prstGeom>
+          <a:solidFill>
+            <a:srgbClr val="1E4DAA"/>
+          </a:solidFill>
+          <a:ln w="12700">
+            <a:solidFill>
+              <a:srgbClr val="1E4DAA"/>
+            </a:solidFill>
+            <a:prstDash val="solid"/>
+          </a:ln>
+        </p:spPr>
+      </p:sp>
+      <p:sp>
+        <p:nvSpPr>
+          <p:cNvPr id="24" name="Text 22"/>
+          <p:cNvSpPr/>
+          <p:nvPr/>
+        </p:nvSpPr>
+        <p:spPr>
+          <a:xfrm>
+            <a:off x="4727448" y="1783080"/>
+            <a:ext cx="929640" cy="256032"/>
+          </a:xfrm>
+          <a:prstGeom prst="rect">
+            <a:avLst/>
+          </a:prstGeom>
+          <a:noFill/>
+          <a:ln/>
+        </p:spPr>
+        <p:txBody>
+          <a:bodyPr wrap="square" lIns="0" tIns="0" rIns="0" bIns="0" rtlCol="0" anchor="ctr"/>
+          <a:lstStyle/>
+          <a:p>
+            <a:pPr indent="0" marL="0">
+              <a:buNone/>
+            </a:pPr>
+            <a:r>
+              <a:rPr lang="en-US" sz="1000" b="1" dirty="0">
+                <a:solidFill>
+                  <a:srgbClr val="1E4DAA"/>
+                </a:solidFill>
+              </a:rPr>
+              <a:t>Gate Pass</a:t>
+            </a:r>
+            <a:endParaRPr lang="en-US" sz="1000" dirty="0"/>
+          </a:p>
+        </p:txBody>
+      </p:sp>
+      <p:sp>
+        <p:nvSpPr>
+          <p:cNvPr id="25" name="Text 23"/>
+          <p:cNvSpPr/>
+          <p:nvPr/>
+        </p:nvSpPr>
+        <p:spPr>
+          <a:xfrm>
+            <a:off x="4727448" y="2057400"/>
+            <a:ext cx="1112520" cy="457200"/>
+          </a:xfrm>
+          <a:prstGeom prst="rect">
+            <a:avLst/>
+          </a:prstGeom>
+          <a:noFill/>
+          <a:ln/>
+        </p:spPr>
+        <p:txBody>
+          <a:bodyPr wrap="square" lIns="0" tIns="0" rIns="0" bIns="0" rtlCol="0" anchor="ctr"/>
+          <a:lstStyle/>
+          <a:p>
+            <a:pPr indent="0" marL="0">
+              <a:buNone/>
+            </a:pPr>
+            <a:r>
+              <a:rPr lang="en-US" sz="750" dirty="0">
+                <a:solidFill>
+                  <a:srgbClr val="1F2937"/>
+                </a:solidFill>
+              </a:rPr>
+              <a:t>CTPAT · visitor log</a:t>
+            </a:r>
+            <a:endParaRPr lang="en-US" sz="750" dirty="0"/>
+          </a:p>
+        </p:txBody>
+      </p:sp>
+      <p:sp>
+        <p:nvSpPr>
+          <p:cNvPr id="26" name="Shape 24"/>
+          <p:cNvSpPr/>
+          <p:nvPr/>
+        </p:nvSpPr>
+        <p:spPr>
+          <a:xfrm>
+            <a:off x="5977128" y="1691640"/>
+            <a:ext cx="1295400" cy="868680"/>
+          </a:xfrm>
+          <a:prstGeom prst="rect">
+            <a:avLst/>
+          </a:prstGeom>
+          <a:solidFill>
+            <a:srgbClr val="FFFFFF"/>
+          </a:solidFill>
+          <a:ln w="6350">
+            <a:solidFill>
+              <a:srgbClr val="E2E8F0"/>
+            </a:solidFill>
+            <a:prstDash val="solid"/>
+          </a:ln>
+        </p:spPr>
+      </p:sp>
+      <p:sp>
+        <p:nvSpPr>
+          <p:cNvPr id="27" name="Shape 25"/>
+          <p:cNvSpPr/>
+          <p:nvPr/>
+        </p:nvSpPr>
+        <p:spPr>
+          <a:xfrm>
+            <a:off x="5977128" y="1691640"/>
+            <a:ext cx="54864" cy="868680"/>
+          </a:xfrm>
+          <a:prstGeom prst="rect">
+            <a:avLst/>
+          </a:prstGeom>
+          <a:solidFill>
+            <a:srgbClr val="1E4DAA"/>
+          </a:solidFill>
+          <a:ln w="12700">
+            <a:solidFill>
+              <a:srgbClr val="1E4DAA"/>
+            </a:solidFill>
+            <a:prstDash val="solid"/>
+          </a:ln>
+        </p:spPr>
+      </p:sp>
+      <p:sp>
+        <p:nvSpPr>
+          <p:cNvPr id="28" name="Shape 26"/>
+          <p:cNvSpPr/>
+          <p:nvPr/>
+        </p:nvSpPr>
+        <p:spPr>
+          <a:xfrm>
+            <a:off x="6998208" y="1746504"/>
+            <a:ext cx="219456" cy="219456"/>
+          </a:xfrm>
+          <a:prstGeom prst="ellipse">
+            <a:avLst/>
+          </a:prstGeom>
+          <a:solidFill>
+            <a:srgbClr val="F37021"/>
+          </a:solidFill>
+          <a:ln w="12700">
+            <a:solidFill>
+              <a:srgbClr val="F37021"/>
+            </a:solidFill>
+            <a:prstDash val="solid"/>
+          </a:ln>
+        </p:spPr>
+      </p:sp>
+      <p:sp>
+        <p:nvSpPr>
+          <p:cNvPr id="29" name="Text 27"/>
+          <p:cNvSpPr/>
+          <p:nvPr/>
+        </p:nvSpPr>
+        <p:spPr>
+          <a:xfrm>
+            <a:off x="6998208" y="1746504"/>
+            <a:ext cx="219456" cy="219456"/>
+          </a:xfrm>
+          <a:prstGeom prst="rect">
+            <a:avLst/>
+          </a:prstGeom>
+          <a:noFill/>
+          <a:ln/>
+        </p:spPr>
+        <p:txBody>
+          <a:bodyPr wrap="square" lIns="0" tIns="0" rIns="0" bIns="0" rtlCol="0" anchor="ctr"/>
+          <a:lstStyle/>
+          <a:p>
+            <a:pPr algn="ctr" indent="0" marL="0">
+              <a:buNone/>
+            </a:pPr>
+            <a:r>
+              <a:rPr lang="en-US" sz="1000" b="1" dirty="0">
+                <a:solidFill>
+                  <a:srgbClr val="FFFFFF"/>
+                </a:solidFill>
+              </a:rPr>
+              <a:t>★</a:t>
+            </a:r>
+            <a:endParaRPr lang="en-US" sz="1000" dirty="0"/>
+          </a:p>
+        </p:txBody>
+      </p:sp>
+      <p:sp>
+        <p:nvSpPr>
+          <p:cNvPr id="30" name="Text 28"/>
+          <p:cNvSpPr/>
+          <p:nvPr/>
+        </p:nvSpPr>
+        <p:spPr>
+          <a:xfrm>
+            <a:off x="6096000" y="1783080"/>
+            <a:ext cx="929640" cy="256032"/>
+          </a:xfrm>
+          <a:prstGeom prst="rect">
+            <a:avLst/>
+          </a:prstGeom>
+          <a:noFill/>
+          <a:ln/>
+        </p:spPr>
+        <p:txBody>
+          <a:bodyPr wrap="square" lIns="0" tIns="0" rIns="0" bIns="0" rtlCol="0" anchor="ctr"/>
+          <a:lstStyle/>
+          <a:p>
+            <a:pPr indent="0" marL="0">
+              <a:buNone/>
+            </a:pPr>
+            <a:r>
+              <a:rPr lang="en-US" sz="1000" b="1" dirty="0">
+                <a:solidFill>
+                  <a:srgbClr val="1E4DAA"/>
+                </a:solidFill>
+              </a:rPr>
+              <a:t>Car Booking ★</a:t>
+            </a:r>
+            <a:endParaRPr lang="en-US" sz="1000" dirty="0"/>
+          </a:p>
+        </p:txBody>
+      </p:sp>
+      <p:sp>
+        <p:nvSpPr>
+          <p:cNvPr id="31" name="Text 29"/>
+          <p:cNvSpPr/>
+          <p:nvPr/>
+        </p:nvSpPr>
+        <p:spPr>
+          <a:xfrm>
+            <a:off x="6096000" y="2057400"/>
+            <a:ext cx="1112520" cy="457200"/>
+          </a:xfrm>
+          <a:prstGeom prst="rect">
+            <a:avLst/>
+          </a:prstGeom>
+          <a:noFill/>
+          <a:ln/>
+        </p:spPr>
+        <p:txBody>
+          <a:bodyPr wrap="square" lIns="0" tIns="0" rIns="0" bIns="0" rtlCol="0" anchor="ctr"/>
+          <a:lstStyle/>
+          <a:p>
+            <a:pPr indent="0" marL="0">
+              <a:buNone/>
+            </a:pPr>
+            <a:r>
+              <a:rPr lang="en-US" sz="750" dirty="0">
+                <a:solidFill>
+                  <a:srgbClr val="1F2937"/>
+                </a:solidFill>
+              </a:rPr>
+              <a:t>Agentic · auto-allocate</a:t>
+            </a:r>
+            <a:endParaRPr lang="en-US" sz="750" dirty="0"/>
+          </a:p>
+        </p:txBody>
+      </p:sp>
+      <p:sp>
+        <p:nvSpPr>
+          <p:cNvPr id="32" name="Shape 30"/>
+          <p:cNvSpPr/>
+          <p:nvPr/>
+        </p:nvSpPr>
+        <p:spPr>
+          <a:xfrm>
+            <a:off x="7345680" y="1691640"/>
+            <a:ext cx="1295400" cy="868680"/>
+          </a:xfrm>
+          <a:prstGeom prst="rect">
+            <a:avLst/>
+          </a:prstGeom>
+          <a:solidFill>
+            <a:srgbClr val="FFFFFF"/>
+          </a:solidFill>
+          <a:ln w="6350">
+            <a:solidFill>
+              <a:srgbClr val="E2E8F0"/>
+            </a:solidFill>
+            <a:prstDash val="solid"/>
+          </a:ln>
+        </p:spPr>
+      </p:sp>
+      <p:sp>
+        <p:nvSpPr>
+          <p:cNvPr id="33" name="Shape 31"/>
+          <p:cNvSpPr/>
+          <p:nvPr/>
+        </p:nvSpPr>
+        <p:spPr>
+          <a:xfrm>
+            <a:off x="7345680" y="1691640"/>
+            <a:ext cx="54864" cy="868680"/>
+          </a:xfrm>
+          <a:prstGeom prst="rect">
+            <a:avLst/>
+          </a:prstGeom>
+          <a:solidFill>
+            <a:srgbClr val="1E4DAA"/>
+          </a:solidFill>
+          <a:ln w="12700">
+            <a:solidFill>
+              <a:srgbClr val="1E4DAA"/>
+            </a:solidFill>
+            <a:prstDash val="solid"/>
+          </a:ln>
+        </p:spPr>
+      </p:sp>
+      <p:sp>
+        <p:nvSpPr>
+          <p:cNvPr id="34" name="Text 32"/>
+          <p:cNvSpPr/>
+          <p:nvPr/>
+        </p:nvSpPr>
+        <p:spPr>
+          <a:xfrm>
+            <a:off x="7464552" y="1783080"/>
+            <a:ext cx="929640" cy="256032"/>
+          </a:xfrm>
+          <a:prstGeom prst="rect">
+            <a:avLst/>
+          </a:prstGeom>
+          <a:noFill/>
+          <a:ln/>
+        </p:spPr>
+        <p:txBody>
+          <a:bodyPr wrap="square" lIns="0" tIns="0" rIns="0" bIns="0" rtlCol="0" anchor="ctr"/>
+          <a:lstStyle/>
+          <a:p>
+            <a:pPr indent="0" marL="0">
+              <a:buNone/>
+            </a:pPr>
+            <a:r>
+              <a:rPr lang="en-US" sz="1000" b="1" dirty="0">
+                <a:solidFill>
+                  <a:srgbClr val="1E4DAA"/>
+                </a:solidFill>
+              </a:rPr>
+              <a:t>Accounting</a:t>
+            </a:r>
+            <a:endParaRPr lang="en-US" sz="1000" dirty="0"/>
+          </a:p>
+        </p:txBody>
+      </p:sp>
+      <p:sp>
+        <p:nvSpPr>
+          <p:cNvPr id="35" name="Text 33"/>
+          <p:cNvSpPr/>
+          <p:nvPr/>
+        </p:nvSpPr>
+        <p:spPr>
+          <a:xfrm>
+            <a:off x="7464552" y="2057400"/>
+            <a:ext cx="1112520" cy="457200"/>
+          </a:xfrm>
+          <a:prstGeom prst="rect">
+            <a:avLst/>
+          </a:prstGeom>
+          <a:noFill/>
+          <a:ln/>
+        </p:spPr>
+        <p:txBody>
+          <a:bodyPr wrap="square" lIns="0" tIns="0" rIns="0" bIns="0" rtlCol="0" anchor="ctr"/>
+          <a:lstStyle/>
+          <a:p>
+            <a:pPr indent="0" marL="0">
+              <a:buNone/>
+            </a:pPr>
+            <a:r>
+              <a:rPr lang="en-US" sz="750" dirty="0">
+                <a:solidFill>
+                  <a:srgbClr val="1F2937"/>
+                </a:solidFill>
+              </a:rPr>
+              <a:t>Full + GDT filing</a:t>
+            </a:r>
+            <a:endParaRPr lang="en-US" sz="750" dirty="0"/>
+          </a:p>
+        </p:txBody>
+      </p:sp>
+      <p:sp>
+        <p:nvSpPr>
+          <p:cNvPr id="36" name="Shape 34"/>
+          <p:cNvSpPr/>
+          <p:nvPr/>
+        </p:nvSpPr>
+        <p:spPr>
+          <a:xfrm>
+            <a:off x="502920" y="2633472"/>
+            <a:ext cx="1295400" cy="868680"/>
+          </a:xfrm>
+          <a:prstGeom prst="rect">
+            <a:avLst/>
+          </a:prstGeom>
+          <a:solidFill>
+            <a:srgbClr val="FFFFFF"/>
+          </a:solidFill>
+          <a:ln w="6350">
+            <a:solidFill>
+              <a:srgbClr val="E2E8F0"/>
+            </a:solidFill>
+            <a:prstDash val="solid"/>
+          </a:ln>
+        </p:spPr>
+      </p:sp>
+      <p:sp>
+        <p:nvSpPr>
+          <p:cNvPr id="37" name="Shape 35"/>
+          <p:cNvSpPr/>
+          <p:nvPr/>
+        </p:nvSpPr>
+        <p:spPr>
+          <a:xfrm>
+            <a:off x="502920" y="2633472"/>
+            <a:ext cx="54864" cy="868680"/>
+          </a:xfrm>
+          <a:prstGeom prst="rect">
+            <a:avLst/>
+          </a:prstGeom>
+          <a:solidFill>
+            <a:srgbClr val="1E4DAA"/>
+          </a:solidFill>
+          <a:ln w="12700">
+            <a:solidFill>
+              <a:srgbClr val="1E4DAA"/>
+            </a:solidFill>
+            <a:prstDash val="solid"/>
+          </a:ln>
+        </p:spPr>
+      </p:sp>
+      <p:sp>
+        <p:nvSpPr>
+          <p:cNvPr id="38" name="Text 36"/>
+          <p:cNvSpPr/>
+          <p:nvPr/>
+        </p:nvSpPr>
+        <p:spPr>
+          <a:xfrm>
+            <a:off x="621792" y="2724912"/>
+            <a:ext cx="929640" cy="256032"/>
+          </a:xfrm>
+          <a:prstGeom prst="rect">
+            <a:avLst/>
+          </a:prstGeom>
+          <a:noFill/>
+          <a:ln/>
+        </p:spPr>
+        <p:txBody>
+          <a:bodyPr wrap="square" lIns="0" tIns="0" rIns="0" bIns="0" rtlCol="0" anchor="ctr"/>
+          <a:lstStyle/>
+          <a:p>
+            <a:pPr indent="0" marL="0">
+              <a:buNone/>
+            </a:pPr>
+            <a:r>
+              <a:rPr lang="en-US" sz="1000" b="1" dirty="0">
+                <a:solidFill>
+                  <a:srgbClr val="1E4DAA"/>
+                </a:solidFill>
+              </a:rPr>
+              <a:t>Speak Up</a:t>
+            </a:r>
+            <a:endParaRPr lang="en-US" sz="1000" dirty="0"/>
+          </a:p>
+        </p:txBody>
+      </p:sp>
+      <p:sp>
+        <p:nvSpPr>
+          <p:cNvPr id="39" name="Text 37"/>
+          <p:cNvSpPr/>
+          <p:nvPr/>
+        </p:nvSpPr>
+        <p:spPr>
+          <a:xfrm>
+            <a:off x="621792" y="2999232"/>
+            <a:ext cx="1112520" cy="457200"/>
+          </a:xfrm>
+          <a:prstGeom prst="rect">
+            <a:avLst/>
+          </a:prstGeom>
+          <a:noFill/>
+          <a:ln/>
+        </p:spPr>
+        <p:txBody>
+          <a:bodyPr wrap="square" lIns="0" tIns="0" rIns="0" bIns="0" rtlCol="0" anchor="ctr"/>
+          <a:lstStyle/>
+          <a:p>
+            <a:pPr indent="0" marL="0">
+              <a:buNone/>
+            </a:pPr>
+            <a:r>
+              <a:rPr lang="en-US" sz="750" dirty="0">
+                <a:solidFill>
+                  <a:srgbClr val="1F2937"/>
+                </a:solidFill>
+              </a:rPr>
+              <a:t>Worker voice · anon channel</a:t>
+            </a:r>
+            <a:endParaRPr lang="en-US" sz="750" dirty="0"/>
+          </a:p>
+        </p:txBody>
+      </p:sp>
+      <p:sp>
+        <p:nvSpPr>
+          <p:cNvPr id="40" name="Shape 38"/>
+          <p:cNvSpPr/>
+          <p:nvPr/>
+        </p:nvSpPr>
+        <p:spPr>
+          <a:xfrm>
+            <a:off x="1871472" y="2633472"/>
+            <a:ext cx="1295400" cy="868680"/>
+          </a:xfrm>
+          <a:prstGeom prst="rect">
+            <a:avLst/>
+          </a:prstGeom>
+          <a:solidFill>
+            <a:srgbClr val="FFFFFF"/>
+          </a:solidFill>
+          <a:ln w="6350">
+            <a:solidFill>
+              <a:srgbClr val="E2E8F0"/>
+            </a:solidFill>
+            <a:prstDash val="solid"/>
+          </a:ln>
+        </p:spPr>
+      </p:sp>
+      <p:sp>
+        <p:nvSpPr>
+          <p:cNvPr id="41" name="Shape 39"/>
+          <p:cNvSpPr/>
+          <p:nvPr/>
+        </p:nvSpPr>
+        <p:spPr>
+          <a:xfrm>
+            <a:off x="1871472" y="2633472"/>
+            <a:ext cx="54864" cy="868680"/>
+          </a:xfrm>
+          <a:prstGeom prst="rect">
+            <a:avLst/>
+          </a:prstGeom>
+          <a:solidFill>
+            <a:srgbClr val="1E4DAA"/>
+          </a:solidFill>
+          <a:ln w="12700">
+            <a:solidFill>
+              <a:srgbClr val="1E4DAA"/>
+            </a:solidFill>
+            <a:prstDash val="solid"/>
+          </a:ln>
+        </p:spPr>
+      </p:sp>
+      <p:sp>
+        <p:nvSpPr>
+          <p:cNvPr id="42" name="Text 40"/>
+          <p:cNvSpPr/>
+          <p:nvPr/>
+        </p:nvSpPr>
+        <p:spPr>
+          <a:xfrm>
+            <a:off x="1990344" y="2724912"/>
+            <a:ext cx="929640" cy="256032"/>
+          </a:xfrm>
+          <a:prstGeom prst="rect">
+            <a:avLst/>
+          </a:prstGeom>
+          <a:noFill/>
+          <a:ln/>
+        </p:spPr>
+        <p:txBody>
+          <a:bodyPr wrap="square" lIns="0" tIns="0" rIns="0" bIns="0" rtlCol="0" anchor="ctr"/>
+          <a:lstStyle/>
+          <a:p>
+            <a:pPr indent="0" marL="0">
+              <a:buNone/>
+            </a:pPr>
+            <a:r>
+              <a:rPr lang="en-US" sz="1000" b="1" dirty="0">
+                <a:solidFill>
+                  <a:srgbClr val="1E4DAA"/>
+                </a:solidFill>
+              </a:rPr>
+              <a:t>Corp Financials</a:t>
+            </a:r>
+            <a:endParaRPr lang="en-US" sz="1000" dirty="0"/>
+          </a:p>
+        </p:txBody>
+      </p:sp>
+      <p:sp>
+        <p:nvSpPr>
+          <p:cNvPr id="43" name="Text 41"/>
+          <p:cNvSpPr/>
+          <p:nvPr/>
+        </p:nvSpPr>
+        <p:spPr>
+          <a:xfrm>
+            <a:off x="1990344" y="2999232"/>
+            <a:ext cx="1112520" cy="457200"/>
+          </a:xfrm>
+          <a:prstGeom prst="rect">
+            <a:avLst/>
+          </a:prstGeom>
+          <a:noFill/>
+          <a:ln/>
+        </p:spPr>
+        <p:txBody>
+          <a:bodyPr wrap="square" lIns="0" tIns="0" rIns="0" bIns="0" rtlCol="0" anchor="ctr"/>
+          <a:lstStyle/>
+          <a:p>
+            <a:pPr indent="0" marL="0">
+              <a:buNone/>
+            </a:pPr>
+            <a:r>
+              <a:rPr lang="en-US" sz="750" dirty="0">
+                <a:solidFill>
+                  <a:srgbClr val="1F2937"/>
+                </a:solidFill>
+              </a:rPr>
+              <a:t>+ IEWS · owner view</a:t>
+            </a:r>
+            <a:endParaRPr lang="en-US" sz="750" dirty="0"/>
+          </a:p>
+        </p:txBody>
+      </p:sp>
+      <p:sp>
+        <p:nvSpPr>
+          <p:cNvPr id="44" name="Shape 42"/>
+          <p:cNvSpPr/>
+          <p:nvPr/>
+        </p:nvSpPr>
+        <p:spPr>
+          <a:xfrm>
+            <a:off x="3240024" y="2633472"/>
+            <a:ext cx="1295400" cy="868680"/>
+          </a:xfrm>
+          <a:prstGeom prst="rect">
+            <a:avLst/>
+          </a:prstGeom>
+          <a:solidFill>
+            <a:srgbClr val="FFFFFF"/>
+          </a:solidFill>
+          <a:ln w="6350">
+            <a:solidFill>
+              <a:srgbClr val="E2E8F0"/>
+            </a:solidFill>
+            <a:prstDash val="solid"/>
+          </a:ln>
+        </p:spPr>
+      </p:sp>
+      <p:sp>
+        <p:nvSpPr>
+          <p:cNvPr id="45" name="Shape 43"/>
+          <p:cNvSpPr/>
+          <p:nvPr/>
+        </p:nvSpPr>
+        <p:spPr>
+          <a:xfrm>
+            <a:off x="3240024" y="2633472"/>
+            <a:ext cx="54864" cy="868680"/>
+          </a:xfrm>
+          <a:prstGeom prst="rect">
+            <a:avLst/>
+          </a:prstGeom>
+          <a:solidFill>
+            <a:srgbClr val="1E4DAA"/>
+          </a:solidFill>
+          <a:ln w="12700">
+            <a:solidFill>
+              <a:srgbClr val="1E4DAA"/>
+            </a:solidFill>
+            <a:prstDash val="solid"/>
+          </a:ln>
+        </p:spPr>
+      </p:sp>
+      <p:sp>
+        <p:nvSpPr>
+          <p:cNvPr id="46" name="Text 44"/>
+          <p:cNvSpPr/>
+          <p:nvPr/>
+        </p:nvSpPr>
+        <p:spPr>
+          <a:xfrm>
+            <a:off x="3358896" y="2724912"/>
+            <a:ext cx="929640" cy="256032"/>
+          </a:xfrm>
+          <a:prstGeom prst="rect">
+            <a:avLst/>
+          </a:prstGeom>
+          <a:noFill/>
+          <a:ln/>
+        </p:spPr>
+        <p:txBody>
+          <a:bodyPr wrap="square" lIns="0" tIns="0" rIns="0" bIns="0" rtlCol="0" anchor="ctr"/>
+          <a:lstStyle/>
+          <a:p>
+            <a:pPr indent="0" marL="0">
+              <a:buNone/>
+            </a:pPr>
+            <a:r>
+              <a:rPr lang="en-US" sz="1000" b="1" dirty="0">
+                <a:solidFill>
+                  <a:srgbClr val="1E4DAA"/>
+                </a:solidFill>
+              </a:rPr>
+              <a:t>Cambodia E-Gov</a:t>
+            </a:r>
+            <a:endParaRPr lang="en-US" sz="1000" dirty="0"/>
+          </a:p>
+        </p:txBody>
+      </p:sp>
+      <p:sp>
+        <p:nvSpPr>
+          <p:cNvPr id="47" name="Text 45"/>
+          <p:cNvSpPr/>
+          <p:nvPr/>
+        </p:nvSpPr>
+        <p:spPr>
+          <a:xfrm>
+            <a:off x="3358896" y="2999232"/>
+            <a:ext cx="1112520" cy="457200"/>
+          </a:xfrm>
+          <a:prstGeom prst="rect">
+            <a:avLst/>
+          </a:prstGeom>
+          <a:noFill/>
+          <a:ln/>
+        </p:spPr>
+        <p:txBody>
+          <a:bodyPr wrap="square" lIns="0" tIns="0" rIns="0" bIns="0" rtlCol="0" anchor="ctr"/>
+          <a:lstStyle/>
+          <a:p>
+            <a:pPr indent="0" marL="0">
+              <a:buNone/>
+            </a:pPr>
+            <a:r>
+              <a:rPr lang="en-US" sz="750" dirty="0">
+                <a:solidFill>
+                  <a:srgbClr val="1F2937"/>
+                </a:solidFill>
+              </a:rPr>
+              <a:t>+ E-Invoice · ministry filings</a:t>
+            </a:r>
+            <a:endParaRPr lang="en-US" sz="750" dirty="0"/>
+          </a:p>
+        </p:txBody>
+      </p:sp>
+      <p:sp>
+        <p:nvSpPr>
+          <p:cNvPr id="48" name="Shape 46"/>
+          <p:cNvSpPr/>
+          <p:nvPr/>
+        </p:nvSpPr>
+        <p:spPr>
+          <a:xfrm>
+            <a:off x="4608576" y="2633472"/>
+            <a:ext cx="1295400" cy="868680"/>
+          </a:xfrm>
+          <a:prstGeom prst="rect">
+            <a:avLst/>
+          </a:prstGeom>
+          <a:solidFill>
+            <a:srgbClr val="FFFFFF"/>
+          </a:solidFill>
+          <a:ln w="6350">
+            <a:solidFill>
+              <a:srgbClr val="E2E8F0"/>
+            </a:solidFill>
+            <a:prstDash val="solid"/>
+          </a:ln>
+        </p:spPr>
+      </p:sp>
+      <p:sp>
+        <p:nvSpPr>
+          <p:cNvPr id="49" name="Shape 47"/>
+          <p:cNvSpPr/>
+          <p:nvPr/>
+        </p:nvSpPr>
+        <p:spPr>
+          <a:xfrm>
+            <a:off x="4608576" y="2633472"/>
+            <a:ext cx="54864" cy="868680"/>
+          </a:xfrm>
+          <a:prstGeom prst="rect">
+            <a:avLst/>
+          </a:prstGeom>
+          <a:solidFill>
+            <a:srgbClr val="0A1F47"/>
+          </a:solidFill>
+          <a:ln w="12700">
             <a:solidFill>
               <a:srgbClr val="0A1F47"/>
             </a:solidFill>
@@ -14838,86 +15373,86 @@
       </p:sp>
       <p:sp>
         <p:nvSpPr>
-          <p:cNvPr id="38" name="Text 12"/>
-          <p:cNvSpPr/>
-          <p:nvPr/>
-        </p:nvSpPr>
-        <p:spPr>
-          <a:xfrm>
-            <a:off x="2670048" y="3685032"/>
-            <a:ext cx="1746504" cy="228600"/>
-          </a:xfrm>
-          <a:prstGeom prst="rect">
-            <a:avLst/>
-          </a:prstGeom>
-          <a:noFill/>
-          <a:ln/>
-        </p:spPr>
-        <p:txBody>
-          <a:bodyPr wrap="square" lIns="0" tIns="0" rIns="0" bIns="0" rtlCol="0" anchor="ctr"/>
-          <a:lstStyle/>
-          <a:p>
-            <a:pPr indent="0" marL="0">
-              <a:buNone/>
-            </a:pPr>
-            <a:r>
-              <a:rPr lang="en-US" sz="900" b="1" spc="300" kern="0" dirty="0">
+          <p:cNvPr id="50" name="Text 48"/>
+          <p:cNvSpPr/>
+          <p:nvPr/>
+        </p:nvSpPr>
+        <p:spPr>
+          <a:xfrm>
+            <a:off x="4727448" y="2724912"/>
+            <a:ext cx="929640" cy="256032"/>
+          </a:xfrm>
+          <a:prstGeom prst="rect">
+            <a:avLst/>
+          </a:prstGeom>
+          <a:noFill/>
+          <a:ln/>
+        </p:spPr>
+        <p:txBody>
+          <a:bodyPr wrap="square" lIns="0" tIns="0" rIns="0" bIns="0" rtlCol="0" anchor="ctr"/>
+          <a:lstStyle/>
+          <a:p>
+            <a:pPr indent="0" marL="0">
+              <a:buNone/>
+            </a:pPr>
+            <a:r>
+              <a:rPr lang="en-US" sz="1000" b="1" dirty="0">
                 <a:solidFill>
                   <a:srgbClr val="0A1F47"/>
                 </a:solidFill>
               </a:rPr>
-              <a:t>PLATFORM</a:t>
-            </a:r>
-            <a:endParaRPr lang="en-US" sz="900" dirty="0"/>
-          </a:p>
-        </p:txBody>
-      </p:sp>
-      <p:sp>
-        <p:nvSpPr>
-          <p:cNvPr id="39" name="Text 13"/>
-          <p:cNvSpPr/>
-          <p:nvPr/>
-        </p:nvSpPr>
-        <p:spPr>
-          <a:xfrm>
-            <a:off x="2670048" y="4023360"/>
-            <a:ext cx="1746504" cy="502920"/>
-          </a:xfrm>
-          <a:prstGeom prst="rect">
-            <a:avLst/>
-          </a:prstGeom>
-          <a:noFill/>
-          <a:ln/>
-        </p:spPr>
-        <p:txBody>
-          <a:bodyPr wrap="square" lIns="0" tIns="0" rIns="0" bIns="0" rtlCol="0" anchor="ctr"/>
-          <a:lstStyle/>
-          <a:p>
-            <a:pPr indent="0" marL="0">
-              <a:buNone/>
-            </a:pPr>
-            <a:r>
-              <a:rPr lang="en-US" sz="1800" b="1" dirty="0">
-                <a:solidFill>
-                  <a:srgbClr val="0A1F47"/>
-                </a:solidFill>
-              </a:rPr>
-              <a:t>1 module · core</a:t>
-            </a:r>
-            <a:endParaRPr lang="en-US" sz="1800" dirty="0"/>
-          </a:p>
-        </p:txBody>
-      </p:sp>
-      <p:sp>
-        <p:nvSpPr>
-          <p:cNvPr id="40" name="Shape 14"/>
-          <p:cNvSpPr/>
-          <p:nvPr/>
-        </p:nvSpPr>
-        <p:spPr>
-          <a:xfrm>
-            <a:off x="4617720" y="3520440"/>
-            <a:ext cx="1965960" cy="1097280"/>
+              <a:t>Platform Core</a:t>
+            </a:r>
+            <a:endParaRPr lang="en-US" sz="1000" dirty="0"/>
+          </a:p>
+        </p:txBody>
+      </p:sp>
+      <p:sp>
+        <p:nvSpPr>
+          <p:cNvPr id="51" name="Text 49"/>
+          <p:cNvSpPr/>
+          <p:nvPr/>
+        </p:nvSpPr>
+        <p:spPr>
+          <a:xfrm>
+            <a:off x="4727448" y="2999232"/>
+            <a:ext cx="1112520" cy="457200"/>
+          </a:xfrm>
+          <a:prstGeom prst="rect">
+            <a:avLst/>
+          </a:prstGeom>
+          <a:noFill/>
+          <a:ln/>
+        </p:spPr>
+        <p:txBody>
+          <a:bodyPr wrap="square" lIns="0" tIns="0" rIns="0" bIns="0" rtlCol="0" anchor="ctr"/>
+          <a:lstStyle/>
+          <a:p>
+            <a:pPr indent="0" marL="0">
+              <a:buNone/>
+            </a:pPr>
+            <a:r>
+              <a:rPr lang="en-US" sz="750" dirty="0">
+                <a:solidFill>
+                  <a:srgbClr val="1F2937"/>
+                </a:solidFill>
+              </a:rPr>
+              <a:t>Laravel · Mongo · Mobile · AIoT · Ai Server</a:t>
+            </a:r>
+            <a:endParaRPr lang="en-US" sz="750" dirty="0"/>
+          </a:p>
+        </p:txBody>
+      </p:sp>
+      <p:sp>
+        <p:nvSpPr>
+          <p:cNvPr id="52" name="Shape 50"/>
+          <p:cNvSpPr/>
+          <p:nvPr/>
+        </p:nvSpPr>
+        <p:spPr>
+          <a:xfrm>
+            <a:off x="5977128" y="2633472"/>
+            <a:ext cx="1295400" cy="868680"/>
           </a:xfrm>
           <a:prstGeom prst="rect">
             <a:avLst/>
@@ -14925,7 +15460,32 @@
           <a:solidFill>
             <a:srgbClr val="FFFFFF"/>
           </a:solidFill>
-          <a:ln w="19050">
+          <a:ln w="6350">
+            <a:solidFill>
+              <a:srgbClr val="E2E8F0"/>
+            </a:solidFill>
+            <a:prstDash val="solid"/>
+          </a:ln>
+        </p:spPr>
+      </p:sp>
+      <p:sp>
+        <p:nvSpPr>
+          <p:cNvPr id="53" name="Shape 51"/>
+          <p:cNvSpPr/>
+          <p:nvPr/>
+        </p:nvSpPr>
+        <p:spPr>
+          <a:xfrm>
+            <a:off x="5977128" y="2633472"/>
+            <a:ext cx="54864" cy="868680"/>
+          </a:xfrm>
+          <a:prstGeom prst="rect">
+            <a:avLst/>
+          </a:prstGeom>
+          <a:solidFill>
+            <a:srgbClr val="10B981"/>
+          </a:solidFill>
+          <a:ln w="12700">
             <a:solidFill>
               <a:srgbClr val="10B981"/>
             </a:solidFill>
@@ -14935,86 +15495,86 @@
       </p:sp>
       <p:sp>
         <p:nvSpPr>
-          <p:cNvPr id="41" name="Text 15"/>
-          <p:cNvSpPr/>
-          <p:nvPr/>
-        </p:nvSpPr>
-        <p:spPr>
-          <a:xfrm>
-            <a:off x="4727448" y="3685032"/>
-            <a:ext cx="1746504" cy="228600"/>
-          </a:xfrm>
-          <a:prstGeom prst="rect">
-            <a:avLst/>
-          </a:prstGeom>
-          <a:noFill/>
-          <a:ln/>
-        </p:spPr>
-        <p:txBody>
-          <a:bodyPr wrap="square" lIns="0" tIns="0" rIns="0" bIns="0" rtlCol="0" anchor="ctr"/>
-          <a:lstStyle/>
-          <a:p>
-            <a:pPr indent="0" marL="0">
-              <a:buNone/>
-            </a:pPr>
-            <a:r>
-              <a:rPr lang="en-US" sz="900" b="1" spc="300" kern="0" dirty="0">
+          <p:cNvPr id="54" name="Text 52"/>
+          <p:cNvSpPr/>
+          <p:nvPr/>
+        </p:nvSpPr>
+        <p:spPr>
+          <a:xfrm>
+            <a:off x="6096000" y="2724912"/>
+            <a:ext cx="929640" cy="256032"/>
+          </a:xfrm>
+          <a:prstGeom prst="rect">
+            <a:avLst/>
+          </a:prstGeom>
+          <a:noFill/>
+          <a:ln/>
+        </p:spPr>
+        <p:txBody>
+          <a:bodyPr wrap="square" lIns="0" tIns="0" rIns="0" bIns="0" rtlCol="0" anchor="ctr"/>
+          <a:lstStyle/>
+          <a:p>
+            <a:pPr indent="0" marL="0">
+              <a:buNone/>
+            </a:pPr>
+            <a:r>
+              <a:rPr lang="en-US" sz="1000" b="1" dirty="0">
                 <a:solidFill>
                   <a:srgbClr val="10B981"/>
                 </a:solidFill>
               </a:rPr>
-              <a:t>OPERATIONS</a:t>
-            </a:r>
-            <a:endParaRPr lang="en-US" sz="900" dirty="0"/>
-          </a:p>
-        </p:txBody>
-      </p:sp>
-      <p:sp>
-        <p:nvSpPr>
-          <p:cNvPr id="42" name="Text 16"/>
-          <p:cNvSpPr/>
-          <p:nvPr/>
-        </p:nvSpPr>
-        <p:spPr>
-          <a:xfrm>
-            <a:off x="4727448" y="4023360"/>
-            <a:ext cx="1746504" cy="502920"/>
-          </a:xfrm>
-          <a:prstGeom prst="rect">
-            <a:avLst/>
-          </a:prstGeom>
-          <a:noFill/>
-          <a:ln/>
-        </p:spPr>
-        <p:txBody>
-          <a:bodyPr wrap="square" lIns="0" tIns="0" rIns="0" bIns="0" rtlCol="0" anchor="ctr"/>
-          <a:lstStyle/>
-          <a:p>
-            <a:pPr indent="0" marL="0">
-              <a:buNone/>
-            </a:pPr>
-            <a:r>
-              <a:rPr lang="en-US" sz="1800" b="1" dirty="0">
-                <a:solidFill>
-                  <a:srgbClr val="0A1F47"/>
-                </a:solidFill>
-              </a:rPr>
-              <a:t>8 modules</a:t>
-            </a:r>
-            <a:endParaRPr lang="en-US" sz="1800" dirty="0"/>
-          </a:p>
-        </p:txBody>
-      </p:sp>
-      <p:sp>
-        <p:nvSpPr>
-          <p:cNvPr id="43" name="Shape 17"/>
-          <p:cNvSpPr/>
-          <p:nvPr/>
-        </p:nvSpPr>
-        <p:spPr>
-          <a:xfrm>
-            <a:off x="6675120" y="3520440"/>
-            <a:ext cx="1965960" cy="1097280"/>
+              <a:t>YTM</a:t>
+            </a:r>
+            <a:endParaRPr lang="en-US" sz="1000" dirty="0"/>
+          </a:p>
+        </p:txBody>
+      </p:sp>
+      <p:sp>
+        <p:nvSpPr>
+          <p:cNvPr id="55" name="Text 53"/>
+          <p:cNvSpPr/>
+          <p:nvPr/>
+        </p:nvSpPr>
+        <p:spPr>
+          <a:xfrm>
+            <a:off x="6096000" y="2999232"/>
+            <a:ext cx="1112520" cy="457200"/>
+          </a:xfrm>
+          <a:prstGeom prst="rect">
+            <a:avLst/>
+          </a:prstGeom>
+          <a:noFill/>
+          <a:ln/>
+        </p:spPr>
+        <p:txBody>
+          <a:bodyPr wrap="square" lIns="0" tIns="0" rIns="0" bIns="0" rtlCol="0" anchor="ctr"/>
+          <a:lstStyle/>
+          <a:p>
+            <a:pPr indent="0" marL="0">
+              <a:buNone/>
+            </a:pPr>
+            <a:r>
+              <a:rPr lang="en-US" sz="750" dirty="0">
+                <a:solidFill>
+                  <a:srgbClr val="1F2937"/>
+                </a:solidFill>
+              </a:rPr>
+              <a:t>Machine maintenance · TPM shop</a:t>
+            </a:r>
+            <a:endParaRPr lang="en-US" sz="750" dirty="0"/>
+          </a:p>
+        </p:txBody>
+      </p:sp>
+      <p:sp>
+        <p:nvSpPr>
+          <p:cNvPr id="56" name="Shape 54"/>
+          <p:cNvSpPr/>
+          <p:nvPr/>
+        </p:nvSpPr>
+        <p:spPr>
+          <a:xfrm>
+            <a:off x="7345680" y="2633472"/>
+            <a:ext cx="1295400" cy="868680"/>
           </a:xfrm>
           <a:prstGeom prst="rect">
             <a:avLst/>
@@ -15022,7 +15582,301 @@
           <a:solidFill>
             <a:srgbClr val="FFFFFF"/>
           </a:solidFill>
-          <a:ln w="19050">
+          <a:ln w="6350">
+            <a:solidFill>
+              <a:srgbClr val="E2E8F0"/>
+            </a:solidFill>
+            <a:prstDash val="solid"/>
+          </a:ln>
+        </p:spPr>
+      </p:sp>
+      <p:sp>
+        <p:nvSpPr>
+          <p:cNvPr id="57" name="Shape 55"/>
+          <p:cNvSpPr/>
+          <p:nvPr/>
+        </p:nvSpPr>
+        <p:spPr>
+          <a:xfrm>
+            <a:off x="7345680" y="2633472"/>
+            <a:ext cx="54864" cy="868680"/>
+          </a:xfrm>
+          <a:prstGeom prst="rect">
+            <a:avLst/>
+          </a:prstGeom>
+          <a:solidFill>
+            <a:srgbClr val="10B981"/>
+          </a:solidFill>
+          <a:ln w="12700">
+            <a:solidFill>
+              <a:srgbClr val="10B981"/>
+            </a:solidFill>
+            <a:prstDash val="solid"/>
+          </a:ln>
+        </p:spPr>
+      </p:sp>
+      <p:sp>
+        <p:nvSpPr>
+          <p:cNvPr id="58" name="Text 56"/>
+          <p:cNvSpPr/>
+          <p:nvPr/>
+        </p:nvSpPr>
+        <p:spPr>
+          <a:xfrm>
+            <a:off x="7464552" y="2724912"/>
+            <a:ext cx="929640" cy="256032"/>
+          </a:xfrm>
+          <a:prstGeom prst="rect">
+            <a:avLst/>
+          </a:prstGeom>
+          <a:noFill/>
+          <a:ln/>
+        </p:spPr>
+        <p:txBody>
+          <a:bodyPr wrap="square" lIns="0" tIns="0" rIns="0" bIns="0" rtlCol="0" anchor="ctr"/>
+          <a:lstStyle/>
+          <a:p>
+            <a:pPr indent="0" marL="0">
+              <a:buNone/>
+            </a:pPr>
+            <a:r>
+              <a:rPr lang="en-US" sz="1000" b="1" dirty="0">
+                <a:solidFill>
+                  <a:srgbClr val="10B981"/>
+                </a:solidFill>
+              </a:rPr>
+              <a:t>YQMS</a:t>
+            </a:r>
+            <a:endParaRPr lang="en-US" sz="1000" dirty="0"/>
+          </a:p>
+        </p:txBody>
+      </p:sp>
+      <p:sp>
+        <p:nvSpPr>
+          <p:cNvPr id="59" name="Text 57"/>
+          <p:cNvSpPr/>
+          <p:nvPr/>
+        </p:nvSpPr>
+        <p:spPr>
+          <a:xfrm>
+            <a:off x="7464552" y="2999232"/>
+            <a:ext cx="1112520" cy="457200"/>
+          </a:xfrm>
+          <a:prstGeom prst="rect">
+            <a:avLst/>
+          </a:prstGeom>
+          <a:noFill/>
+          <a:ln/>
+        </p:spPr>
+        <p:txBody>
+          <a:bodyPr wrap="square" lIns="0" tIns="0" rIns="0" bIns="0" rtlCol="0" anchor="ctr"/>
+          <a:lstStyle/>
+          <a:p>
+            <a:pPr indent="0" marL="0">
+              <a:buNone/>
+            </a:pPr>
+            <a:r>
+              <a:rPr lang="en-US" sz="750" dirty="0">
+                <a:solidFill>
+                  <a:srgbClr val="1F2937"/>
+                </a:solidFill>
+              </a:rPr>
+              <a:t>QC 6 stages · Fini check</a:t>
+            </a:r>
+            <a:endParaRPr lang="en-US" sz="750" dirty="0"/>
+          </a:p>
+        </p:txBody>
+      </p:sp>
+      <p:sp>
+        <p:nvSpPr>
+          <p:cNvPr id="60" name="Shape 58"/>
+          <p:cNvSpPr/>
+          <p:nvPr/>
+        </p:nvSpPr>
+        <p:spPr>
+          <a:xfrm>
+            <a:off x="502920" y="3575304"/>
+            <a:ext cx="1295400" cy="868680"/>
+          </a:xfrm>
+          <a:prstGeom prst="rect">
+            <a:avLst/>
+          </a:prstGeom>
+          <a:solidFill>
+            <a:srgbClr val="FFFFFF"/>
+          </a:solidFill>
+          <a:ln w="6350">
+            <a:solidFill>
+              <a:srgbClr val="E2E8F0"/>
+            </a:solidFill>
+            <a:prstDash val="solid"/>
+          </a:ln>
+        </p:spPr>
+      </p:sp>
+      <p:sp>
+        <p:nvSpPr>
+          <p:cNvPr id="61" name="Shape 59"/>
+          <p:cNvSpPr/>
+          <p:nvPr/>
+        </p:nvSpPr>
+        <p:spPr>
+          <a:xfrm>
+            <a:off x="502920" y="3575304"/>
+            <a:ext cx="54864" cy="868680"/>
+          </a:xfrm>
+          <a:prstGeom prst="rect">
+            <a:avLst/>
+          </a:prstGeom>
+          <a:solidFill>
+            <a:srgbClr val="10B981"/>
+          </a:solidFill>
+          <a:ln w="12700">
+            <a:solidFill>
+              <a:srgbClr val="10B981"/>
+            </a:solidFill>
+            <a:prstDash val="solid"/>
+          </a:ln>
+        </p:spPr>
+      </p:sp>
+      <p:sp>
+        <p:nvSpPr>
+          <p:cNvPr id="62" name="Text 60"/>
+          <p:cNvSpPr/>
+          <p:nvPr/>
+        </p:nvSpPr>
+        <p:spPr>
+          <a:xfrm>
+            <a:off x="621792" y="3666744"/>
+            <a:ext cx="929640" cy="256032"/>
+          </a:xfrm>
+          <a:prstGeom prst="rect">
+            <a:avLst/>
+          </a:prstGeom>
+          <a:noFill/>
+          <a:ln/>
+        </p:spPr>
+        <p:txBody>
+          <a:bodyPr wrap="square" lIns="0" tIns="0" rIns="0" bIns="0" rtlCol="0" anchor="ctr"/>
+          <a:lstStyle/>
+          <a:p>
+            <a:pPr indent="0" marL="0">
+              <a:buNone/>
+            </a:pPr>
+            <a:r>
+              <a:rPr lang="en-US" sz="1000" b="1" dirty="0">
+                <a:solidFill>
+                  <a:srgbClr val="10B981"/>
+                </a:solidFill>
+              </a:rPr>
+              <a:t>YPI</a:t>
+            </a:r>
+            <a:endParaRPr lang="en-US" sz="1000" dirty="0"/>
+          </a:p>
+        </p:txBody>
+      </p:sp>
+      <p:sp>
+        <p:nvSpPr>
+          <p:cNvPr id="63" name="Text 61"/>
+          <p:cNvSpPr/>
+          <p:nvPr/>
+        </p:nvSpPr>
+        <p:spPr>
+          <a:xfrm>
+            <a:off x="621792" y="3941064"/>
+            <a:ext cx="1112520" cy="457200"/>
+          </a:xfrm>
+          <a:prstGeom prst="rect">
+            <a:avLst/>
+          </a:prstGeom>
+          <a:noFill/>
+          <a:ln/>
+        </p:spPr>
+        <p:txBody>
+          <a:bodyPr wrap="square" lIns="0" tIns="0" rIns="0" bIns="0" rtlCol="0" anchor="ctr"/>
+          <a:lstStyle/>
+          <a:p>
+            <a:pPr indent="0" marL="0">
+              <a:buNone/>
+            </a:pPr>
+            <a:r>
+              <a:rPr lang="en-US" sz="750" dirty="0">
+                <a:solidFill>
+                  <a:srgbClr val="1F2937"/>
+                </a:solidFill>
+              </a:rPr>
+              <a:t>Tech specs · 3-language</a:t>
+            </a:r>
+            <a:endParaRPr lang="en-US" sz="750" dirty="0"/>
+          </a:p>
+        </p:txBody>
+      </p:sp>
+      <p:sp>
+        <p:nvSpPr>
+          <p:cNvPr id="64" name="Shape 62"/>
+          <p:cNvSpPr/>
+          <p:nvPr/>
+        </p:nvSpPr>
+        <p:spPr>
+          <a:xfrm>
+            <a:off x="1871472" y="3575304"/>
+            <a:ext cx="1295400" cy="868680"/>
+          </a:xfrm>
+          <a:prstGeom prst="rect">
+            <a:avLst/>
+          </a:prstGeom>
+          <a:solidFill>
+            <a:srgbClr val="FFFFFF"/>
+          </a:solidFill>
+          <a:ln w="6350">
+            <a:solidFill>
+              <a:srgbClr val="E2E8F0"/>
+            </a:solidFill>
+            <a:prstDash val="solid"/>
+          </a:ln>
+        </p:spPr>
+      </p:sp>
+      <p:sp>
+        <p:nvSpPr>
+          <p:cNvPr id="65" name="Shape 63"/>
+          <p:cNvSpPr/>
+          <p:nvPr/>
+        </p:nvSpPr>
+        <p:spPr>
+          <a:xfrm>
+            <a:off x="1871472" y="3575304"/>
+            <a:ext cx="54864" cy="868680"/>
+          </a:xfrm>
+          <a:prstGeom prst="rect">
+            <a:avLst/>
+          </a:prstGeom>
+          <a:solidFill>
+            <a:srgbClr val="10B981"/>
+          </a:solidFill>
+          <a:ln w="12700">
+            <a:solidFill>
+              <a:srgbClr val="10B981"/>
+            </a:solidFill>
+            <a:prstDash val="solid"/>
+          </a:ln>
+        </p:spPr>
+      </p:sp>
+      <p:sp>
+        <p:nvSpPr>
+          <p:cNvPr id="66" name="Shape 64"/>
+          <p:cNvSpPr/>
+          <p:nvPr/>
+        </p:nvSpPr>
+        <p:spPr>
+          <a:xfrm>
+            <a:off x="2892552" y="3630168"/>
+            <a:ext cx="219456" cy="219456"/>
+          </a:xfrm>
+          <a:prstGeom prst="ellipse">
+            <a:avLst/>
+          </a:prstGeom>
+          <a:solidFill>
+            <a:srgbClr val="F37021"/>
+          </a:solidFill>
+          <a:ln w="12700">
             <a:solidFill>
               <a:srgbClr val="F37021"/>
             </a:solidFill>
@@ -15032,73 +15886,841 @@
       </p:sp>
       <p:sp>
         <p:nvSpPr>
-          <p:cNvPr id="44" name="Text 18"/>
-          <p:cNvSpPr/>
-          <p:nvPr/>
-        </p:nvSpPr>
-        <p:spPr>
-          <a:xfrm>
-            <a:off x="6784848" y="3685032"/>
-            <a:ext cx="1746504" cy="228600"/>
-          </a:xfrm>
-          <a:prstGeom prst="rect">
-            <a:avLst/>
-          </a:prstGeom>
-          <a:noFill/>
-          <a:ln/>
-        </p:spPr>
-        <p:txBody>
-          <a:bodyPr wrap="square" lIns="0" tIns="0" rIns="0" bIns="0" rtlCol="0" anchor="ctr"/>
-          <a:lstStyle/>
-          <a:p>
-            <a:pPr indent="0" marL="0">
-              <a:buNone/>
-            </a:pPr>
-            <a:r>
-              <a:rPr lang="en-US" sz="900" b="1" spc="300" kern="0" dirty="0">
-                <a:solidFill>
-                  <a:srgbClr val="F37021"/>
-                </a:solidFill>
-              </a:rPr>
-              <a:t>AGENTIC ★</a:t>
-            </a:r>
-            <a:endParaRPr lang="en-US" sz="900" dirty="0"/>
-          </a:p>
-        </p:txBody>
-      </p:sp>
-      <p:sp>
-        <p:nvSpPr>
-          <p:cNvPr id="45" name="Text 19"/>
-          <p:cNvSpPr/>
-          <p:nvPr/>
-        </p:nvSpPr>
-        <p:spPr>
-          <a:xfrm>
-            <a:off x="6784848" y="4023360"/>
-            <a:ext cx="1746504" cy="502920"/>
-          </a:xfrm>
-          <a:prstGeom prst="rect">
-            <a:avLst/>
-          </a:prstGeom>
-          <a:noFill/>
-          <a:ln/>
-        </p:spPr>
-        <p:txBody>
-          <a:bodyPr wrap="square" lIns="0" tIns="0" rIns="0" bIns="0" rtlCol="0" anchor="ctr"/>
-          <a:lstStyle/>
-          <a:p>
-            <a:pPr indent="0" marL="0">
-              <a:buNone/>
-            </a:pPr>
-            <a:r>
-              <a:rPr lang="en-US" sz="1800" b="1" dirty="0">
+          <p:cNvPr id="67" name="Text 65"/>
+          <p:cNvSpPr/>
+          <p:nvPr/>
+        </p:nvSpPr>
+        <p:spPr>
+          <a:xfrm>
+            <a:off x="2892552" y="3630168"/>
+            <a:ext cx="219456" cy="219456"/>
+          </a:xfrm>
+          <a:prstGeom prst="rect">
+            <a:avLst/>
+          </a:prstGeom>
+          <a:noFill/>
+          <a:ln/>
+        </p:spPr>
+        <p:txBody>
+          <a:bodyPr wrap="square" lIns="0" tIns="0" rIns="0" bIns="0" rtlCol="0" anchor="ctr"/>
+          <a:lstStyle/>
+          <a:p>
+            <a:pPr algn="ctr" indent="0" marL="0">
+              <a:buNone/>
+            </a:pPr>
+            <a:r>
+              <a:rPr lang="en-US" sz="1000" b="1" dirty="0">
+                <a:solidFill>
+                  <a:srgbClr val="FFFFFF"/>
+                </a:solidFill>
+              </a:rPr>
+              <a:t>★</a:t>
+            </a:r>
+            <a:endParaRPr lang="en-US" sz="1000" dirty="0"/>
+          </a:p>
+        </p:txBody>
+      </p:sp>
+      <p:sp>
+        <p:nvSpPr>
+          <p:cNvPr id="68" name="Text 66"/>
+          <p:cNvSpPr/>
+          <p:nvPr/>
+        </p:nvSpPr>
+        <p:spPr>
+          <a:xfrm>
+            <a:off x="1990344" y="3666744"/>
+            <a:ext cx="929640" cy="256032"/>
+          </a:xfrm>
+          <a:prstGeom prst="rect">
+            <a:avLst/>
+          </a:prstGeom>
+          <a:noFill/>
+          <a:ln/>
+        </p:spPr>
+        <p:txBody>
+          <a:bodyPr wrap="square" lIns="0" tIns="0" rIns="0" bIns="0" rtlCol="0" anchor="ctr"/>
+          <a:lstStyle/>
+          <a:p>
+            <a:pPr indent="0" marL="0">
+              <a:buNone/>
+            </a:pPr>
+            <a:r>
+              <a:rPr lang="en-US" sz="1000" b="1" dirty="0">
+                <a:solidFill>
+                  <a:srgbClr val="10B981"/>
+                </a:solidFill>
+              </a:rPr>
+              <a:t>YPM / CE ★</a:t>
+            </a:r>
+            <a:endParaRPr lang="en-US" sz="1000" dirty="0"/>
+          </a:p>
+        </p:txBody>
+      </p:sp>
+      <p:sp>
+        <p:nvSpPr>
+          <p:cNvPr id="69" name="Text 67"/>
+          <p:cNvSpPr/>
+          <p:nvPr/>
+        </p:nvSpPr>
+        <p:spPr>
+          <a:xfrm>
+            <a:off x="1990344" y="3941064"/>
+            <a:ext cx="1112520" cy="457200"/>
+          </a:xfrm>
+          <a:prstGeom prst="rect">
+            <a:avLst/>
+          </a:prstGeom>
+          <a:noFill/>
+          <a:ln/>
+        </p:spPr>
+        <p:txBody>
+          <a:bodyPr wrap="square" lIns="0" tIns="0" rIns="0" bIns="0" rtlCol="0" anchor="ctr"/>
+          <a:lstStyle/>
+          <a:p>
+            <a:pPr indent="0" marL="0">
+              <a:buNone/>
+            </a:pPr>
+            <a:r>
+              <a:rPr lang="en-US" sz="750" dirty="0">
+                <a:solidFill>
+                  <a:srgbClr val="1F2937"/>
+                </a:solidFill>
+              </a:rPr>
+              <a:t>Motion · SMV · Agentic</a:t>
+            </a:r>
+            <a:endParaRPr lang="en-US" sz="750" dirty="0"/>
+          </a:p>
+        </p:txBody>
+      </p:sp>
+      <p:sp>
+        <p:nvSpPr>
+          <p:cNvPr id="70" name="Shape 68"/>
+          <p:cNvSpPr/>
+          <p:nvPr/>
+        </p:nvSpPr>
+        <p:spPr>
+          <a:xfrm>
+            <a:off x="3240024" y="3575304"/>
+            <a:ext cx="1295400" cy="868680"/>
+          </a:xfrm>
+          <a:prstGeom prst="rect">
+            <a:avLst/>
+          </a:prstGeom>
+          <a:solidFill>
+            <a:srgbClr val="FFFFFF"/>
+          </a:solidFill>
+          <a:ln w="6350">
+            <a:solidFill>
+              <a:srgbClr val="E2E8F0"/>
+            </a:solidFill>
+            <a:prstDash val="solid"/>
+          </a:ln>
+        </p:spPr>
+      </p:sp>
+      <p:sp>
+        <p:nvSpPr>
+          <p:cNvPr id="71" name="Shape 69"/>
+          <p:cNvSpPr/>
+          <p:nvPr/>
+        </p:nvSpPr>
+        <p:spPr>
+          <a:xfrm>
+            <a:off x="3240024" y="3575304"/>
+            <a:ext cx="54864" cy="868680"/>
+          </a:xfrm>
+          <a:prstGeom prst="rect">
+            <a:avLst/>
+          </a:prstGeom>
+          <a:solidFill>
+            <a:srgbClr val="10B981"/>
+          </a:solidFill>
+          <a:ln w="12700">
+            <a:solidFill>
+              <a:srgbClr val="10B981"/>
+            </a:solidFill>
+            <a:prstDash val="solid"/>
+          </a:ln>
+        </p:spPr>
+      </p:sp>
+      <p:sp>
+        <p:nvSpPr>
+          <p:cNvPr id="72" name="Text 70"/>
+          <p:cNvSpPr/>
+          <p:nvPr/>
+        </p:nvSpPr>
+        <p:spPr>
+          <a:xfrm>
+            <a:off x="3358896" y="3666744"/>
+            <a:ext cx="929640" cy="256032"/>
+          </a:xfrm>
+          <a:prstGeom prst="rect">
+            <a:avLst/>
+          </a:prstGeom>
+          <a:noFill/>
+          <a:ln/>
+        </p:spPr>
+        <p:txBody>
+          <a:bodyPr wrap="square" lIns="0" tIns="0" rIns="0" bIns="0" rtlCol="0" anchor="ctr"/>
+          <a:lstStyle/>
+          <a:p>
+            <a:pPr indent="0" marL="0">
+              <a:buNone/>
+            </a:pPr>
+            <a:r>
+              <a:rPr lang="en-US" sz="1000" b="1" dirty="0">
+                <a:solidFill>
+                  <a:srgbClr val="10B981"/>
+                </a:solidFill>
+              </a:rPr>
+              <a:t>Product Dev</a:t>
+            </a:r>
+            <a:endParaRPr lang="en-US" sz="1000" dirty="0"/>
+          </a:p>
+        </p:txBody>
+      </p:sp>
+      <p:sp>
+        <p:nvSpPr>
+          <p:cNvPr id="73" name="Text 71"/>
+          <p:cNvSpPr/>
+          <p:nvPr/>
+        </p:nvSpPr>
+        <p:spPr>
+          <a:xfrm>
+            <a:off x="3358896" y="3941064"/>
+            <a:ext cx="1112520" cy="457200"/>
+          </a:xfrm>
+          <a:prstGeom prst="rect">
+            <a:avLst/>
+          </a:prstGeom>
+          <a:noFill/>
+          <a:ln/>
+        </p:spPr>
+        <p:txBody>
+          <a:bodyPr wrap="square" lIns="0" tIns="0" rIns="0" bIns="0" rtlCol="0" anchor="ctr"/>
+          <a:lstStyle/>
+          <a:p>
+            <a:pPr indent="0" marL="0">
+              <a:buNone/>
+            </a:pPr>
+            <a:r>
+              <a:rPr lang="en-US" sz="750" dirty="0">
+                <a:solidFill>
+                  <a:srgbClr val="1F2937"/>
+                </a:solidFill>
+              </a:rPr>
+              <a:t>Sample room · pattern</a:t>
+            </a:r>
+            <a:endParaRPr lang="en-US" sz="750" dirty="0"/>
+          </a:p>
+        </p:txBody>
+      </p:sp>
+      <p:sp>
+        <p:nvSpPr>
+          <p:cNvPr id="74" name="Shape 72"/>
+          <p:cNvSpPr/>
+          <p:nvPr/>
+        </p:nvSpPr>
+        <p:spPr>
+          <a:xfrm>
+            <a:off x="4608576" y="3575304"/>
+            <a:ext cx="1295400" cy="868680"/>
+          </a:xfrm>
+          <a:prstGeom prst="rect">
+            <a:avLst/>
+          </a:prstGeom>
+          <a:solidFill>
+            <a:srgbClr val="FFFFFF"/>
+          </a:solidFill>
+          <a:ln w="6350">
+            <a:solidFill>
+              <a:srgbClr val="E2E8F0"/>
+            </a:solidFill>
+            <a:prstDash val="solid"/>
+          </a:ln>
+        </p:spPr>
+      </p:sp>
+      <p:sp>
+        <p:nvSpPr>
+          <p:cNvPr id="75" name="Shape 73"/>
+          <p:cNvSpPr/>
+          <p:nvPr/>
+        </p:nvSpPr>
+        <p:spPr>
+          <a:xfrm>
+            <a:off x="4608576" y="3575304"/>
+            <a:ext cx="54864" cy="868680"/>
+          </a:xfrm>
+          <a:prstGeom prst="rect">
+            <a:avLst/>
+          </a:prstGeom>
+          <a:solidFill>
+            <a:srgbClr val="10B981"/>
+          </a:solidFill>
+          <a:ln w="12700">
+            <a:solidFill>
+              <a:srgbClr val="10B981"/>
+            </a:solidFill>
+            <a:prstDash val="solid"/>
+          </a:ln>
+        </p:spPr>
+      </p:sp>
+      <p:sp>
+        <p:nvSpPr>
+          <p:cNvPr id="76" name="Text 74"/>
+          <p:cNvSpPr/>
+          <p:nvPr/>
+        </p:nvSpPr>
+        <p:spPr>
+          <a:xfrm>
+            <a:off x="4727448" y="3666744"/>
+            <a:ext cx="929640" cy="256032"/>
+          </a:xfrm>
+          <a:prstGeom prst="rect">
+            <a:avLst/>
+          </a:prstGeom>
+          <a:noFill/>
+          <a:ln/>
+        </p:spPr>
+        <p:txBody>
+          <a:bodyPr wrap="square" lIns="0" tIns="0" rIns="0" bIns="0" rtlCol="0" anchor="ctr"/>
+          <a:lstStyle/>
+          <a:p>
+            <a:pPr indent="0" marL="0">
+              <a:buNone/>
+            </a:pPr>
+            <a:r>
+              <a:rPr lang="en-US" sz="1000" b="1" dirty="0">
+                <a:solidFill>
+                  <a:srgbClr val="10B981"/>
+                </a:solidFill>
+              </a:rPr>
+              <a:t>4DP</a:t>
+            </a:r>
+            <a:endParaRPr lang="en-US" sz="1000" dirty="0"/>
+          </a:p>
+        </p:txBody>
+      </p:sp>
+      <p:sp>
+        <p:nvSpPr>
+          <p:cNvPr id="77" name="Text 75"/>
+          <p:cNvSpPr/>
+          <p:nvPr/>
+        </p:nvSpPr>
+        <p:spPr>
+          <a:xfrm>
+            <a:off x="4727448" y="3941064"/>
+            <a:ext cx="1112520" cy="457200"/>
+          </a:xfrm>
+          <a:prstGeom prst="rect">
+            <a:avLst/>
+          </a:prstGeom>
+          <a:noFill/>
+          <a:ln/>
+        </p:spPr>
+        <p:txBody>
+          <a:bodyPr wrap="square" lIns="0" tIns="0" rIns="0" bIns="0" rtlCol="0" anchor="ctr"/>
+          <a:lstStyle/>
+          <a:p>
+            <a:pPr indent="0" marL="0">
+              <a:buNone/>
+            </a:pPr>
+            <a:r>
+              <a:rPr lang="en-US" sz="750" dirty="0">
+                <a:solidFill>
+                  <a:srgbClr val="1F2937"/>
+                </a:solidFill>
+              </a:rPr>
+              <a:t>Planning brain · 4 dirs × 4 levels</a:t>
+            </a:r>
+            <a:endParaRPr lang="en-US" sz="750" dirty="0"/>
+          </a:p>
+        </p:txBody>
+      </p:sp>
+      <p:sp>
+        <p:nvSpPr>
+          <p:cNvPr id="78" name="Shape 76"/>
+          <p:cNvSpPr/>
+          <p:nvPr/>
+        </p:nvSpPr>
+        <p:spPr>
+          <a:xfrm>
+            <a:off x="5977128" y="3575304"/>
+            <a:ext cx="1295400" cy="868680"/>
+          </a:xfrm>
+          <a:prstGeom prst="rect">
+            <a:avLst/>
+          </a:prstGeom>
+          <a:solidFill>
+            <a:srgbClr val="FFFFFF"/>
+          </a:solidFill>
+          <a:ln w="6350">
+            <a:solidFill>
+              <a:srgbClr val="E2E8F0"/>
+            </a:solidFill>
+            <a:prstDash val="solid"/>
+          </a:ln>
+        </p:spPr>
+      </p:sp>
+      <p:sp>
+        <p:nvSpPr>
+          <p:cNvPr id="79" name="Shape 77"/>
+          <p:cNvSpPr/>
+          <p:nvPr/>
+        </p:nvSpPr>
+        <p:spPr>
+          <a:xfrm>
+            <a:off x="5977128" y="3575304"/>
+            <a:ext cx="54864" cy="868680"/>
+          </a:xfrm>
+          <a:prstGeom prst="rect">
+            <a:avLst/>
+          </a:prstGeom>
+          <a:solidFill>
+            <a:srgbClr val="10B981"/>
+          </a:solidFill>
+          <a:ln w="12700">
+            <a:solidFill>
+              <a:srgbClr val="10B981"/>
+            </a:solidFill>
+            <a:prstDash val="solid"/>
+          </a:ln>
+        </p:spPr>
+      </p:sp>
+      <p:sp>
+        <p:nvSpPr>
+          <p:cNvPr id="80" name="Text 78"/>
+          <p:cNvSpPr/>
+          <p:nvPr/>
+        </p:nvSpPr>
+        <p:spPr>
+          <a:xfrm>
+            <a:off x="6096000" y="3666744"/>
+            <a:ext cx="929640" cy="256032"/>
+          </a:xfrm>
+          <a:prstGeom prst="rect">
+            <a:avLst/>
+          </a:prstGeom>
+          <a:noFill/>
+          <a:ln/>
+        </p:spPr>
+        <p:txBody>
+          <a:bodyPr wrap="square" lIns="0" tIns="0" rIns="0" bIns="0" rtlCol="0" anchor="ctr"/>
+          <a:lstStyle/>
+          <a:p>
+            <a:pPr indent="0" marL="0">
+              <a:buNone/>
+            </a:pPr>
+            <a:r>
+              <a:rPr lang="en-US" sz="1000" b="1" dirty="0">
+                <a:solidFill>
+                  <a:srgbClr val="10B981"/>
+                </a:solidFill>
+              </a:rPr>
+              <a:t>MRP + Logistics</a:t>
+            </a:r>
+            <a:endParaRPr lang="en-US" sz="1000" dirty="0"/>
+          </a:p>
+        </p:txBody>
+      </p:sp>
+      <p:sp>
+        <p:nvSpPr>
+          <p:cNvPr id="81" name="Text 79"/>
+          <p:cNvSpPr/>
+          <p:nvPr/>
+        </p:nvSpPr>
+        <p:spPr>
+          <a:xfrm>
+            <a:off x="6096000" y="3941064"/>
+            <a:ext cx="1112520" cy="457200"/>
+          </a:xfrm>
+          <a:prstGeom prst="rect">
+            <a:avLst/>
+          </a:prstGeom>
+          <a:noFill/>
+          <a:ln/>
+        </p:spPr>
+        <p:txBody>
+          <a:bodyPr wrap="square" lIns="0" tIns="0" rIns="0" bIns="0" rtlCol="0" anchor="ctr"/>
+          <a:lstStyle/>
+          <a:p>
+            <a:pPr indent="0" marL="0">
+              <a:buNone/>
+            </a:pPr>
+            <a:r>
+              <a:rPr lang="en-US" sz="750" dirty="0">
+                <a:solidFill>
+                  <a:srgbClr val="1F2937"/>
+                </a:solidFill>
+              </a:rPr>
+              <a:t>Inbound + outbound</a:t>
+            </a:r>
+            <a:endParaRPr lang="en-US" sz="750" dirty="0"/>
+          </a:p>
+        </p:txBody>
+      </p:sp>
+      <p:sp>
+        <p:nvSpPr>
+          <p:cNvPr id="82" name="Shape 80"/>
+          <p:cNvSpPr/>
+          <p:nvPr/>
+        </p:nvSpPr>
+        <p:spPr>
+          <a:xfrm>
+            <a:off x="7345680" y="3575304"/>
+            <a:ext cx="1295400" cy="868680"/>
+          </a:xfrm>
+          <a:prstGeom prst="rect">
+            <a:avLst/>
+          </a:prstGeom>
+          <a:solidFill>
+            <a:srgbClr val="FFFFFF"/>
+          </a:solidFill>
+          <a:ln w="6350">
+            <a:solidFill>
+              <a:srgbClr val="E2E8F0"/>
+            </a:solidFill>
+            <a:prstDash val="solid"/>
+          </a:ln>
+        </p:spPr>
+      </p:sp>
+      <p:sp>
+        <p:nvSpPr>
+          <p:cNvPr id="83" name="Shape 81"/>
+          <p:cNvSpPr/>
+          <p:nvPr/>
+        </p:nvSpPr>
+        <p:spPr>
+          <a:xfrm>
+            <a:off x="7345680" y="3575304"/>
+            <a:ext cx="54864" cy="868680"/>
+          </a:xfrm>
+          <a:prstGeom prst="rect">
+            <a:avLst/>
+          </a:prstGeom>
+          <a:solidFill>
+            <a:srgbClr val="10B981"/>
+          </a:solidFill>
+          <a:ln w="12700">
+            <a:solidFill>
+              <a:srgbClr val="10B981"/>
+            </a:solidFill>
+            <a:prstDash val="solid"/>
+          </a:ln>
+        </p:spPr>
+      </p:sp>
+      <p:sp>
+        <p:nvSpPr>
+          <p:cNvPr id="84" name="Text 82"/>
+          <p:cNvSpPr/>
+          <p:nvPr/>
+        </p:nvSpPr>
+        <p:spPr>
+          <a:xfrm>
+            <a:off x="7464552" y="3666744"/>
+            <a:ext cx="929640" cy="256032"/>
+          </a:xfrm>
+          <a:prstGeom prst="rect">
+            <a:avLst/>
+          </a:prstGeom>
+          <a:noFill/>
+          <a:ln/>
+        </p:spPr>
+        <p:txBody>
+          <a:bodyPr wrap="square" lIns="0" tIns="0" rIns="0" bIns="0" rtlCol="0" anchor="ctr"/>
+          <a:lstStyle/>
+          <a:p>
+            <a:pPr indent="0" marL="0">
+              <a:buNone/>
+            </a:pPr>
+            <a:r>
+              <a:rPr lang="en-US" sz="1000" b="1" dirty="0">
+                <a:solidFill>
+                  <a:srgbClr val="10B981"/>
+                </a:solidFill>
+              </a:rPr>
+              <a:t>YWIP</a:t>
+            </a:r>
+            <a:endParaRPr lang="en-US" sz="1000" dirty="0"/>
+          </a:p>
+        </p:txBody>
+      </p:sp>
+      <p:sp>
+        <p:nvSpPr>
+          <p:cNvPr id="85" name="Text 83"/>
+          <p:cNvSpPr/>
+          <p:nvPr/>
+        </p:nvSpPr>
+        <p:spPr>
+          <a:xfrm>
+            <a:off x="7464552" y="3941064"/>
+            <a:ext cx="1112520" cy="457200"/>
+          </a:xfrm>
+          <a:prstGeom prst="rect">
+            <a:avLst/>
+          </a:prstGeom>
+          <a:noFill/>
+          <a:ln/>
+        </p:spPr>
+        <p:txBody>
+          <a:bodyPr wrap="square" lIns="0" tIns="0" rIns="0" bIns="0" rtlCol="0" anchor="ctr"/>
+          <a:lstStyle/>
+          <a:p>
+            <a:pPr indent="0" marL="0">
+              <a:buNone/>
+            </a:pPr>
+            <a:r>
+              <a:rPr lang="en-US" sz="750" dirty="0">
+                <a:solidFill>
+                  <a:srgbClr val="1F2937"/>
+                </a:solidFill>
+              </a:rPr>
+              <a:t>13-dept production flow</a:t>
+            </a:r>
+            <a:endParaRPr lang="en-US" sz="750" dirty="0"/>
+          </a:p>
+        </p:txBody>
+      </p:sp>
+      <p:sp>
+        <p:nvSpPr>
+          <p:cNvPr id="86" name="Shape 84"/>
+          <p:cNvSpPr/>
+          <p:nvPr/>
+        </p:nvSpPr>
+        <p:spPr>
+          <a:xfrm>
+            <a:off x="502920" y="4535424"/>
+            <a:ext cx="164592" cy="128016"/>
+          </a:xfrm>
+          <a:prstGeom prst="rect">
+            <a:avLst/>
+          </a:prstGeom>
+          <a:solidFill>
+            <a:srgbClr val="1E4DAA"/>
+          </a:solidFill>
+          <a:ln w="12700">
+            <a:solidFill>
+              <a:srgbClr val="1E4DAA"/>
+            </a:solidFill>
+            <a:prstDash val="solid"/>
+          </a:ln>
+        </p:spPr>
+      </p:sp>
+      <p:sp>
+        <p:nvSpPr>
+          <p:cNvPr id="87" name="Text 85"/>
+          <p:cNvSpPr/>
+          <p:nvPr/>
+        </p:nvSpPr>
+        <p:spPr>
+          <a:xfrm>
+            <a:off x="704088" y="4498848"/>
+            <a:ext cx="2286000" cy="201168"/>
+          </a:xfrm>
+          <a:prstGeom prst="rect">
+            <a:avLst/>
+          </a:prstGeom>
+          <a:noFill/>
+          <a:ln/>
+        </p:spPr>
+        <p:txBody>
+          <a:bodyPr wrap="square" lIns="0" tIns="0" rIns="0" bIns="0" rtlCol="0" anchor="ctr"/>
+          <a:lstStyle/>
+          <a:p>
+            <a:pPr indent="0" marL="0">
+              <a:buNone/>
+            </a:pPr>
+            <a:r>
+              <a:rPr lang="en-US" sz="800" b="1" spc="200" kern="0" dirty="0">
                 <a:solidFill>
                   <a:srgbClr val="0A1F47"/>
                 </a:solidFill>
               </a:rPr>
-              <a:t>2 live</a:t>
-            </a:r>
-            <a:endParaRPr lang="en-US" sz="1800" dirty="0"/>
+              <a:t>ADMINISTRATION · 9 modules</a:t>
+            </a:r>
+            <a:endParaRPr lang="en-US" sz="800" dirty="0"/>
+          </a:p>
+        </p:txBody>
+      </p:sp>
+      <p:sp>
+        <p:nvSpPr>
+          <p:cNvPr id="88" name="Shape 86"/>
+          <p:cNvSpPr/>
+          <p:nvPr/>
+        </p:nvSpPr>
+        <p:spPr>
+          <a:xfrm>
+            <a:off x="2697480" y="4535424"/>
+            <a:ext cx="164592" cy="128016"/>
+          </a:xfrm>
+          <a:prstGeom prst="rect">
+            <a:avLst/>
+          </a:prstGeom>
+          <a:solidFill>
+            <a:srgbClr val="0A1F47"/>
+          </a:solidFill>
+          <a:ln w="12700">
+            <a:solidFill>
+              <a:srgbClr val="0A1F47"/>
+            </a:solidFill>
+            <a:prstDash val="solid"/>
+          </a:ln>
+        </p:spPr>
+      </p:sp>
+      <p:sp>
+        <p:nvSpPr>
+          <p:cNvPr id="89" name="Text 87"/>
+          <p:cNvSpPr/>
+          <p:nvPr/>
+        </p:nvSpPr>
+        <p:spPr>
+          <a:xfrm>
+            <a:off x="2898648" y="4498848"/>
+            <a:ext cx="2286000" cy="201168"/>
+          </a:xfrm>
+          <a:prstGeom prst="rect">
+            <a:avLst/>
+          </a:prstGeom>
+          <a:noFill/>
+          <a:ln/>
+        </p:spPr>
+        <p:txBody>
+          <a:bodyPr wrap="square" lIns="0" tIns="0" rIns="0" bIns="0" rtlCol="0" anchor="ctr"/>
+          <a:lstStyle/>
+          <a:p>
+            <a:pPr indent="0" marL="0">
+              <a:buNone/>
+            </a:pPr>
+            <a:r>
+              <a:rPr lang="en-US" sz="800" b="1" spc="200" kern="0" dirty="0">
+                <a:solidFill>
+                  <a:srgbClr val="0A1F47"/>
+                </a:solidFill>
+              </a:rPr>
+              <a:t>PLATFORM · 1 module</a:t>
+            </a:r>
+            <a:endParaRPr lang="en-US" sz="800" dirty="0"/>
+          </a:p>
+        </p:txBody>
+      </p:sp>
+      <p:sp>
+        <p:nvSpPr>
+          <p:cNvPr id="90" name="Shape 88"/>
+          <p:cNvSpPr/>
+          <p:nvPr/>
+        </p:nvSpPr>
+        <p:spPr>
+          <a:xfrm>
+            <a:off x="4892040" y="4535424"/>
+            <a:ext cx="164592" cy="128016"/>
+          </a:xfrm>
+          <a:prstGeom prst="rect">
+            <a:avLst/>
+          </a:prstGeom>
+          <a:solidFill>
+            <a:srgbClr val="10B981"/>
+          </a:solidFill>
+          <a:ln w="12700">
+            <a:solidFill>
+              <a:srgbClr val="10B981"/>
+            </a:solidFill>
+            <a:prstDash val="solid"/>
+          </a:ln>
+        </p:spPr>
+      </p:sp>
+      <p:sp>
+        <p:nvSpPr>
+          <p:cNvPr id="91" name="Text 89"/>
+          <p:cNvSpPr/>
+          <p:nvPr/>
+        </p:nvSpPr>
+        <p:spPr>
+          <a:xfrm>
+            <a:off x="5093208" y="4498848"/>
+            <a:ext cx="2286000" cy="201168"/>
+          </a:xfrm>
+          <a:prstGeom prst="rect">
+            <a:avLst/>
+          </a:prstGeom>
+          <a:noFill/>
+          <a:ln/>
+        </p:spPr>
+        <p:txBody>
+          <a:bodyPr wrap="square" lIns="0" tIns="0" rIns="0" bIns="0" rtlCol="0" anchor="ctr"/>
+          <a:lstStyle/>
+          <a:p>
+            <a:pPr indent="0" marL="0">
+              <a:buNone/>
+            </a:pPr>
+            <a:r>
+              <a:rPr lang="en-US" sz="800" b="1" spc="200" kern="0" dirty="0">
+                <a:solidFill>
+                  <a:srgbClr val="0A1F47"/>
+                </a:solidFill>
+              </a:rPr>
+              <a:t>OPERATIONS · 8 modules</a:t>
+            </a:r>
+            <a:endParaRPr lang="en-US" sz="800" dirty="0"/>
+          </a:p>
+        </p:txBody>
+      </p:sp>
+      <p:sp>
+        <p:nvSpPr>
+          <p:cNvPr id="92" name="Shape 90"/>
+          <p:cNvSpPr/>
+          <p:nvPr/>
+        </p:nvSpPr>
+        <p:spPr>
+          <a:xfrm>
+            <a:off x="7086600" y="4535424"/>
+            <a:ext cx="164592" cy="128016"/>
+          </a:xfrm>
+          <a:prstGeom prst="rect">
+            <a:avLst/>
+          </a:prstGeom>
+          <a:solidFill>
+            <a:srgbClr val="F37021"/>
+          </a:solidFill>
+          <a:ln w="12700">
+            <a:solidFill>
+              <a:srgbClr val="F37021"/>
+            </a:solidFill>
+            <a:prstDash val="solid"/>
+          </a:ln>
+        </p:spPr>
+      </p:sp>
+      <p:sp>
+        <p:nvSpPr>
+          <p:cNvPr id="93" name="Text 91"/>
+          <p:cNvSpPr/>
+          <p:nvPr/>
+        </p:nvSpPr>
+        <p:spPr>
+          <a:xfrm>
+            <a:off x="7287768" y="4498848"/>
+            <a:ext cx="2286000" cy="201168"/>
+          </a:xfrm>
+          <a:prstGeom prst="rect">
+            <a:avLst/>
+          </a:prstGeom>
+          <a:noFill/>
+          <a:ln/>
+        </p:spPr>
+        <p:txBody>
+          <a:bodyPr wrap="square" lIns="0" tIns="0" rIns="0" bIns="0" rtlCol="0" anchor="ctr"/>
+          <a:lstStyle/>
+          <a:p>
+            <a:pPr indent="0" marL="0">
+              <a:buNone/>
+            </a:pPr>
+            <a:r>
+              <a:rPr lang="en-US" sz="800" b="1" spc="200" kern="0" dirty="0">
+                <a:solidFill>
+                  <a:srgbClr val="0A1F47"/>
+                </a:solidFill>
+              </a:rPr>
+              <a:t>★ AGENTIC LIVE · Car Booking + YPM/CE</a:t>
+            </a:r>
+            <a:endParaRPr lang="en-US" sz="800" dirty="0"/>
           </a:p>
         </p:txBody>
       </p:sp>
@@ -15371,7 +16993,7 @@
                 <a:ea typeface="Calibri" pitchFamily="34" charset="-122"/>
                 <a:cs typeface="Calibri" pitchFamily="34" charset="-120"/>
               </a:rPr>
-              <a:t>Yai · Investor Plan · June 2026</a:t>
+              <a:t>Yai · Strategic DTV · June 2026</a:t>
             </a:r>
             <a:endParaRPr lang="en-US" sz="800" dirty="0"/>
           </a:p>
@@ -16846,7 +18468,7 @@
                 <a:ea typeface="Calibri" pitchFamily="34" charset="-122"/>
                 <a:cs typeface="Calibri" pitchFamily="34" charset="-120"/>
               </a:rPr>
-              <a:t>Yai · Investor Plan · June 2026</a:t>
+              <a:t>Yai · Strategic DTV · June 2026</a:t>
             </a:r>
             <a:endParaRPr lang="en-US" sz="800" dirty="0"/>
           </a:p>
@@ -17812,7 +19434,7 @@
                 <a:ea typeface="Calibri" pitchFamily="34" charset="-122"/>
                 <a:cs typeface="Calibri" pitchFamily="34" charset="-120"/>
               </a:rPr>
-              <a:t>Yai · Investor Plan · June 2026</a:t>
+              <a:t>Yai · Strategic DTV · June 2026</a:t>
             </a:r>
             <a:endParaRPr lang="en-US" sz="800" dirty="0"/>
           </a:p>

--- a/public/downloads/yai-plan-deck.pptx
+++ b/public/downloads/yai-plan-deck.pptx
@@ -3170,7 +3170,7 @@
                   <a:srgbClr val="FFFFFF"/>
                 </a:solidFill>
               </a:rPr>
-              <a:t>Texlink Admin</a:t>
+              <a:t>Texlink Sales &amp; Admin</a:t>
             </a:r>
             <a:endParaRPr lang="en-US" sz="1100" dirty="0"/>
           </a:p>
